--- a/design/hierarchy.pptx
+++ b/design/hierarchy.pptx
@@ -4552,8 +4552,8 @@
         </p:nvSpPr>
         <p:spPr>
           <a:xfrm>
-            <a:off x="1796567" y="1937704"/>
-            <a:ext cx="1543756" cy="276999"/>
+            <a:off x="2106808" y="1951626"/>
+            <a:ext cx="833370" cy="276999"/>
           </a:xfrm>
           <a:prstGeom prst="rect">
             <a:avLst/>
@@ -4568,7 +4568,7 @@
           <a:p>
             <a:r>
               <a:rPr lang="en-CN" sz="1200" dirty="0"/>
-              <a:t>pronounciation.mp3</a:t>
+              <a:t>pron.mp3</a:t>
             </a:r>
           </a:p>
         </p:txBody>
@@ -4895,14 +4895,14 @@
           <p:nvPr>
             <p:extLst>
               <p:ext uri="{D42A27DB-BD31-4B8C-83A1-F6EECF244321}">
-                <p14:modId xmlns:p14="http://schemas.microsoft.com/office/powerpoint/2010/main" val="1566448433"/>
+                <p14:modId xmlns:p14="http://schemas.microsoft.com/office/powerpoint/2010/main" val="2550457287"/>
               </p:ext>
             </p:extLst>
           </p:nvPr>
         </p:nvGraphicFramePr>
         <p:xfrm>
-          <a:off x="2656428" y="1197468"/>
-          <a:ext cx="4794868" cy="274320"/>
+          <a:off x="2656427" y="1197468"/>
+          <a:ext cx="6071940" cy="274320"/>
         </p:xfrm>
         <a:graphic>
           <a:graphicData uri="http://schemas.openxmlformats.org/drawingml/2006/table">
@@ -4911,31 +4911,45 @@
                 <a:tableStyleId>{5C22544A-7EE6-4342-B048-85BDC9FD1C3A}</a:tableStyleId>
               </a:tblPr>
               <a:tblGrid>
-                <a:gridCol w="1198717">
+                <a:gridCol w="1011990">
                   <a:extLst>
                     <a:ext uri="{9D8B030D-6E8A-4147-A177-3AD203B41FA5}">
                       <a16:colId xmlns:a16="http://schemas.microsoft.com/office/drawing/2014/main" val="775975800"/>
                     </a:ext>
                   </a:extLst>
                 </a:gridCol>
-                <a:gridCol w="1198717">
+                <a:gridCol w="1011990">
                   <a:extLst>
                     <a:ext uri="{9D8B030D-6E8A-4147-A177-3AD203B41FA5}">
                       <a16:colId xmlns:a16="http://schemas.microsoft.com/office/drawing/2014/main" val="2859882136"/>
                     </a:ext>
                   </a:extLst>
                 </a:gridCol>
-                <a:gridCol w="1198717">
+                <a:gridCol w="1011990">
                   <a:extLst>
                     <a:ext uri="{9D8B030D-6E8A-4147-A177-3AD203B41FA5}">
                       <a16:colId xmlns:a16="http://schemas.microsoft.com/office/drawing/2014/main" val="2480661890"/>
                     </a:ext>
                   </a:extLst>
                 </a:gridCol>
-                <a:gridCol w="1198717">
+                <a:gridCol w="1011990">
                   <a:extLst>
                     <a:ext uri="{9D8B030D-6E8A-4147-A177-3AD203B41FA5}">
                       <a16:colId xmlns:a16="http://schemas.microsoft.com/office/drawing/2014/main" val="2536831759"/>
+                    </a:ext>
+                  </a:extLst>
+                </a:gridCol>
+                <a:gridCol w="1011990">
+                  <a:extLst>
+                    <a:ext uri="{9D8B030D-6E8A-4147-A177-3AD203B41FA5}">
+                      <a16:colId xmlns:a16="http://schemas.microsoft.com/office/drawing/2014/main" val="2450884560"/>
+                    </a:ext>
+                  </a:extLst>
+                </a:gridCol>
+                <a:gridCol w="1011990">
+                  <a:extLst>
+                    <a:ext uri="{9D8B030D-6E8A-4147-A177-3AD203B41FA5}">
+                      <a16:colId xmlns:a16="http://schemas.microsoft.com/office/drawing/2014/main" val="37746477"/>
                     </a:ext>
                   </a:extLst>
                 </a:gridCol>
@@ -5062,7 +5076,7 @@
                             <a:schemeClr val="tx1"/>
                           </a:solidFill>
                         </a:rPr>
-                        <a:t>ImageNumber</a:t>
+                        <a:t>ImageNo</a:t>
                       </a:r>
                     </a:p>
                   </a:txBody>
@@ -5127,6 +5141,121 @@
                         </a:rPr>
                         <a:t>ype</a:t>
                       </a:r>
+                    </a:p>
+                  </a:txBody>
+                  <a:tcPr>
+                    <a:lnL w="12700" cap="flat" cmpd="sng" algn="ctr">
+                      <a:solidFill>
+                        <a:schemeClr val="tx1"/>
+                      </a:solidFill>
+                      <a:prstDash val="solid"/>
+                      <a:round/>
+                      <a:headEnd type="none" w="med" len="med"/>
+                      <a:tailEnd type="none" w="med" len="med"/>
+                    </a:lnL>
+                    <a:lnR w="12700" cap="flat" cmpd="sng" algn="ctr">
+                      <a:solidFill>
+                        <a:schemeClr val="tx1"/>
+                      </a:solidFill>
+                      <a:prstDash val="solid"/>
+                      <a:round/>
+                      <a:headEnd type="none" w="med" len="med"/>
+                      <a:tailEnd type="none" w="med" len="med"/>
+                    </a:lnR>
+                    <a:lnT w="12700" cap="flat" cmpd="sng" algn="ctr">
+                      <a:solidFill>
+                        <a:schemeClr val="tx1"/>
+                      </a:solidFill>
+                      <a:prstDash val="solid"/>
+                      <a:round/>
+                      <a:headEnd type="none" w="med" len="med"/>
+                      <a:tailEnd type="none" w="med" len="med"/>
+                    </a:lnT>
+                    <a:lnB w="12700" cap="flat" cmpd="sng" algn="ctr">
+                      <a:solidFill>
+                        <a:schemeClr val="tx1"/>
+                      </a:solidFill>
+                      <a:prstDash val="solid"/>
+                      <a:round/>
+                      <a:headEnd type="none" w="med" len="med"/>
+                      <a:tailEnd type="none" w="med" len="med"/>
+                    </a:lnB>
+                    <a:noFill/>
+                  </a:tcPr>
+                </a:tc>
+                <a:tc>
+                  <a:txBody>
+                    <a:bodyPr/>
+                    <a:lstStyle/>
+                    <a:p>
+                      <a:r>
+                        <a:rPr lang="en-CN" sz="1200" dirty="0">
+                          <a:solidFill>
+                            <a:schemeClr val="tx1"/>
+                          </a:solidFill>
+                        </a:rPr>
+                        <a:t>TypeNo</a:t>
+                      </a:r>
+                    </a:p>
+                  </a:txBody>
+                  <a:tcPr>
+                    <a:lnL w="12700" cap="flat" cmpd="sng" algn="ctr">
+                      <a:solidFill>
+                        <a:schemeClr val="tx1"/>
+                      </a:solidFill>
+                      <a:prstDash val="solid"/>
+                      <a:round/>
+                      <a:headEnd type="none" w="med" len="med"/>
+                      <a:tailEnd type="none" w="med" len="med"/>
+                    </a:lnL>
+                    <a:lnR w="12700" cap="flat" cmpd="sng" algn="ctr">
+                      <a:solidFill>
+                        <a:schemeClr val="tx1"/>
+                      </a:solidFill>
+                      <a:prstDash val="solid"/>
+                      <a:round/>
+                      <a:headEnd type="none" w="med" len="med"/>
+                      <a:tailEnd type="none" w="med" len="med"/>
+                    </a:lnR>
+                    <a:lnT w="12700" cap="flat" cmpd="sng" algn="ctr">
+                      <a:solidFill>
+                        <a:schemeClr val="tx1"/>
+                      </a:solidFill>
+                      <a:prstDash val="solid"/>
+                      <a:round/>
+                      <a:headEnd type="none" w="med" len="med"/>
+                      <a:tailEnd type="none" w="med" len="med"/>
+                    </a:lnT>
+                    <a:lnB w="12700" cap="flat" cmpd="sng" algn="ctr">
+                      <a:solidFill>
+                        <a:schemeClr val="tx1"/>
+                      </a:solidFill>
+                      <a:prstDash val="solid"/>
+                      <a:round/>
+                      <a:headEnd type="none" w="med" len="med"/>
+                      <a:tailEnd type="none" w="med" len="med"/>
+                    </a:lnB>
+                    <a:noFill/>
+                  </a:tcPr>
+                </a:tc>
+                <a:tc>
+                  <a:txBody>
+                    <a:bodyPr/>
+                    <a:lstStyle/>
+                    <a:p>
+                      <a:r>
+                        <a:rPr lang="en-CN" sz="1200">
+                          <a:solidFill>
+                            <a:schemeClr val="tx1"/>
+                          </a:solidFill>
+                        </a:rPr>
+                        <a:t>Tag</a:t>
+                      </a:r>
+                      <a:endParaRPr lang="en-CN" sz="1200" dirty="0">
+                        <a:solidFill>
+                          <a:schemeClr val="tx1"/>
+                        </a:solidFill>
+                      </a:endParaRPr>
                     </a:p>
                   </a:txBody>
                   <a:tcPr>

--- a/design/hierarchy.pptx
+++ b/design/hierarchy.pptx
@@ -6,6 +6,8 @@
   </p:sldMasterIdLst>
   <p:sldIdLst>
     <p:sldId id="256" r:id="rId2"/>
+    <p:sldId id="257" r:id="rId3"/>
+    <p:sldId id="258" r:id="rId4"/>
   </p:sldIdLst>
   <p:sldSz cx="12192000" cy="6858000"/>
   <p:notesSz cx="6858000" cy="9144000"/>
@@ -261,7 +263,7 @@
           <a:p>
             <a:fld id="{5DD8AB15-54DA-BC48-9BAB-770E2E857439}" type="datetimeFigureOut">
               <a:rPr lang="en-CN" smtClean="0"/>
-              <a:t>2024/12/1</a:t>
+              <a:t>2024/12/6</a:t>
             </a:fld>
             <a:endParaRPr lang="en-CN"/>
           </a:p>
@@ -461,7 +463,7 @@
           <a:p>
             <a:fld id="{5DD8AB15-54DA-BC48-9BAB-770E2E857439}" type="datetimeFigureOut">
               <a:rPr lang="en-CN" smtClean="0"/>
-              <a:t>2024/12/1</a:t>
+              <a:t>2024/12/6</a:t>
             </a:fld>
             <a:endParaRPr lang="en-CN"/>
           </a:p>
@@ -671,7 +673,7 @@
           <a:p>
             <a:fld id="{5DD8AB15-54DA-BC48-9BAB-770E2E857439}" type="datetimeFigureOut">
               <a:rPr lang="en-CN" smtClean="0"/>
-              <a:t>2024/12/1</a:t>
+              <a:t>2024/12/6</a:t>
             </a:fld>
             <a:endParaRPr lang="en-CN"/>
           </a:p>
@@ -871,7 +873,7 @@
           <a:p>
             <a:fld id="{5DD8AB15-54DA-BC48-9BAB-770E2E857439}" type="datetimeFigureOut">
               <a:rPr lang="en-CN" smtClean="0"/>
-              <a:t>2024/12/1</a:t>
+              <a:t>2024/12/6</a:t>
             </a:fld>
             <a:endParaRPr lang="en-CN"/>
           </a:p>
@@ -1147,7 +1149,7 @@
           <a:p>
             <a:fld id="{5DD8AB15-54DA-BC48-9BAB-770E2E857439}" type="datetimeFigureOut">
               <a:rPr lang="en-CN" smtClean="0"/>
-              <a:t>2024/12/1</a:t>
+              <a:t>2024/12/6</a:t>
             </a:fld>
             <a:endParaRPr lang="en-CN"/>
           </a:p>
@@ -1415,7 +1417,7 @@
           <a:p>
             <a:fld id="{5DD8AB15-54DA-BC48-9BAB-770E2E857439}" type="datetimeFigureOut">
               <a:rPr lang="en-CN" smtClean="0"/>
-              <a:t>2024/12/1</a:t>
+              <a:t>2024/12/6</a:t>
             </a:fld>
             <a:endParaRPr lang="en-CN"/>
           </a:p>
@@ -1830,7 +1832,7 @@
           <a:p>
             <a:fld id="{5DD8AB15-54DA-BC48-9BAB-770E2E857439}" type="datetimeFigureOut">
               <a:rPr lang="en-CN" smtClean="0"/>
-              <a:t>2024/12/1</a:t>
+              <a:t>2024/12/6</a:t>
             </a:fld>
             <a:endParaRPr lang="en-CN"/>
           </a:p>
@@ -1972,7 +1974,7 @@
           <a:p>
             <a:fld id="{5DD8AB15-54DA-BC48-9BAB-770E2E857439}" type="datetimeFigureOut">
               <a:rPr lang="en-CN" smtClean="0"/>
-              <a:t>2024/12/1</a:t>
+              <a:t>2024/12/6</a:t>
             </a:fld>
             <a:endParaRPr lang="en-CN"/>
           </a:p>
@@ -2085,7 +2087,7 @@
           <a:p>
             <a:fld id="{5DD8AB15-54DA-BC48-9BAB-770E2E857439}" type="datetimeFigureOut">
               <a:rPr lang="en-CN" smtClean="0"/>
-              <a:t>2024/12/1</a:t>
+              <a:t>2024/12/6</a:t>
             </a:fld>
             <a:endParaRPr lang="en-CN"/>
           </a:p>
@@ -2398,7 +2400,7 @@
           <a:p>
             <a:fld id="{5DD8AB15-54DA-BC48-9BAB-770E2E857439}" type="datetimeFigureOut">
               <a:rPr lang="en-CN" smtClean="0"/>
-              <a:t>2024/12/1</a:t>
+              <a:t>2024/12/6</a:t>
             </a:fld>
             <a:endParaRPr lang="en-CN"/>
           </a:p>
@@ -2687,7 +2689,7 @@
           <a:p>
             <a:fld id="{5DD8AB15-54DA-BC48-9BAB-770E2E857439}" type="datetimeFigureOut">
               <a:rPr lang="en-CN" smtClean="0"/>
-              <a:t>2024/12/1</a:t>
+              <a:t>2024/12/6</a:t>
             </a:fld>
             <a:endParaRPr lang="en-CN"/>
           </a:p>
@@ -2764,9 +2766,14 @@
 <p:sldMaster xmlns:a="http://schemas.openxmlformats.org/drawingml/2006/main" xmlns:r="http://schemas.openxmlformats.org/officeDocument/2006/relationships" xmlns:p="http://schemas.openxmlformats.org/presentationml/2006/main">
   <p:cSld>
     <p:bg>
-      <p:bgRef idx="1001">
-        <a:schemeClr val="bg1"/>
-      </p:bgRef>
+      <p:bgPr>
+        <a:solidFill>
+          <a:schemeClr val="bg1">
+            <a:lumMod val="85000"/>
+          </a:schemeClr>
+        </a:solidFill>
+        <a:effectLst/>
+      </p:bgPr>
     </p:bg>
     <p:spTree>
       <p:nvGrpSpPr>
@@ -2930,7 +2937,7 @@
           <a:p>
             <a:fld id="{5DD8AB15-54DA-BC48-9BAB-770E2E857439}" type="datetimeFigureOut">
               <a:rPr lang="en-CN" smtClean="0"/>
-              <a:t>2024/12/1</a:t>
+              <a:t>2024/12/6</a:t>
             </a:fld>
             <a:endParaRPr lang="en-CN"/>
           </a:p>
@@ -3333,16 +3340,6 @@
 <file path=ppt/slides/slide1.xml><?xml version="1.0" encoding="utf-8"?>
 <p:sld xmlns:a="http://schemas.openxmlformats.org/drawingml/2006/main" xmlns:r="http://schemas.openxmlformats.org/officeDocument/2006/relationships" xmlns:p="http://schemas.openxmlformats.org/presentationml/2006/main">
   <p:cSld>
-    <p:bg>
-      <p:bgPr>
-        <a:solidFill>
-          <a:schemeClr val="bg1">
-            <a:lumMod val="85000"/>
-          </a:schemeClr>
-        </a:solidFill>
-        <a:effectLst/>
-      </p:bgPr>
-    </p:bg>
     <p:spTree>
       <p:nvGrpSpPr>
         <p:cNvPr id="1" name=""/>
@@ -4895,7 +4892,7 @@
           <p:nvPr>
             <p:extLst>
               <p:ext uri="{D42A27DB-BD31-4B8C-83A1-F6EECF244321}">
-                <p14:modId xmlns:p14="http://schemas.microsoft.com/office/powerpoint/2010/main" val="2550457287"/>
+                <p14:modId xmlns:p14="http://schemas.microsoft.com/office/powerpoint/2010/main" val="166359693"/>
               </p:ext>
             </p:extLst>
           </p:nvPr>
@@ -5117,7 +5114,12 @@
                       <a:headEnd type="none" w="med" len="med"/>
                       <a:tailEnd type="none" w="med" len="med"/>
                     </a:lnB>
-                    <a:noFill/>
+                    <a:solidFill>
+                      <a:schemeClr val="accent2">
+                        <a:lumMod val="60000"/>
+                        <a:lumOff val="40000"/>
+                      </a:schemeClr>
+                    </a:solidFill>
                   </a:tcPr>
                 </a:tc>
                 <a:tc>
@@ -5244,18 +5246,13 @@
                     <a:lstStyle/>
                     <a:p>
                       <a:r>
-                        <a:rPr lang="en-CN" sz="1200">
+                        <a:rPr lang="en-CN" sz="1200" dirty="0">
                           <a:solidFill>
                             <a:schemeClr val="tx1"/>
                           </a:solidFill>
                         </a:rPr>
                         <a:t>Tag</a:t>
                       </a:r>
-                      <a:endParaRPr lang="en-CN" sz="1200" dirty="0">
-                        <a:solidFill>
-                          <a:schemeClr val="tx1"/>
-                        </a:solidFill>
-                      </a:endParaRPr>
                     </a:p>
                   </a:txBody>
                   <a:tcPr>
@@ -5312,6 +5309,1146 @@
     <p:extLst>
       <p:ext uri="{BB962C8B-B14F-4D97-AF65-F5344CB8AC3E}">
         <p14:creationId xmlns:p14="http://schemas.microsoft.com/office/powerpoint/2010/main" val="2338747249"/>
+      </p:ext>
+    </p:extLst>
+  </p:cSld>
+  <p:clrMapOvr>
+    <a:masterClrMapping/>
+  </p:clrMapOvr>
+</p:sld>
+</file>
+
+<file path=ppt/slides/slide2.xml><?xml version="1.0" encoding="utf-8"?>
+<p:sld xmlns:a="http://schemas.openxmlformats.org/drawingml/2006/main" xmlns:r="http://schemas.openxmlformats.org/officeDocument/2006/relationships" xmlns:p="http://schemas.openxmlformats.org/presentationml/2006/main">
+  <p:cSld>
+    <p:spTree>
+      <p:nvGrpSpPr>
+        <p:cNvPr id="1" name=""/>
+        <p:cNvGrpSpPr/>
+        <p:nvPr/>
+      </p:nvGrpSpPr>
+      <p:grpSpPr>
+        <a:xfrm>
+          <a:off x="0" y="0"/>
+          <a:ext cx="0" cy="0"/>
+          <a:chOff x="0" y="0"/>
+          <a:chExt cx="0" cy="0"/>
+        </a:xfrm>
+      </p:grpSpPr>
+      <p:graphicFrame>
+        <p:nvGraphicFramePr>
+          <p:cNvPr id="4" name="Table 3">
+            <a:extLst>
+              <a:ext uri="{FF2B5EF4-FFF2-40B4-BE49-F238E27FC236}">
+                <a16:creationId xmlns:a16="http://schemas.microsoft.com/office/drawing/2014/main" id="{88416B91-C3E9-1A33-B23C-5E02BFB9193C}"/>
+              </a:ext>
+            </a:extLst>
+          </p:cNvPr>
+          <p:cNvGraphicFramePr>
+            <a:graphicFrameLocks noGrp="1"/>
+          </p:cNvGraphicFramePr>
+          <p:nvPr>
+            <p:extLst>
+              <p:ext uri="{D42A27DB-BD31-4B8C-83A1-F6EECF244321}">
+                <p14:modId xmlns:p14="http://schemas.microsoft.com/office/powerpoint/2010/main" val="1918267750"/>
+              </p:ext>
+            </p:extLst>
+          </p:nvPr>
+        </p:nvGraphicFramePr>
+        <p:xfrm>
+          <a:off x="2681143" y="993731"/>
+          <a:ext cx="1039671" cy="274320"/>
+        </p:xfrm>
+        <a:graphic>
+          <a:graphicData uri="http://schemas.openxmlformats.org/drawingml/2006/table">
+            <a:tbl>
+              <a:tblPr firstRow="1" bandRow="1">
+                <a:tableStyleId>{5C22544A-7EE6-4342-B048-85BDC9FD1C3A}</a:tableStyleId>
+              </a:tblPr>
+              <a:tblGrid>
+                <a:gridCol w="1039671">
+                  <a:extLst>
+                    <a:ext uri="{9D8B030D-6E8A-4147-A177-3AD203B41FA5}">
+                      <a16:colId xmlns:a16="http://schemas.microsoft.com/office/drawing/2014/main" val="4195830450"/>
+                    </a:ext>
+                  </a:extLst>
+                </a:gridCol>
+              </a:tblGrid>
+              <a:tr h="246972">
+                <a:tc>
+                  <a:txBody>
+                    <a:bodyPr/>
+                    <a:lstStyle/>
+                    <a:p>
+                      <a:r>
+                        <a:rPr lang="en-CN" sz="1200" dirty="0">
+                          <a:solidFill>
+                            <a:schemeClr val="tx1"/>
+                          </a:solidFill>
+                        </a:rPr>
+                        <a:t>FolderName</a:t>
+                      </a:r>
+                    </a:p>
+                  </a:txBody>
+                  <a:tcPr>
+                    <a:lnL w="12700" cap="flat" cmpd="sng" algn="ctr">
+                      <a:solidFill>
+                        <a:schemeClr val="tx1"/>
+                      </a:solidFill>
+                      <a:prstDash val="solid"/>
+                      <a:round/>
+                      <a:headEnd type="none" w="med" len="med"/>
+                      <a:tailEnd type="none" w="med" len="med"/>
+                    </a:lnL>
+                    <a:lnR w="12700" cap="flat" cmpd="sng" algn="ctr">
+                      <a:solidFill>
+                        <a:schemeClr val="tx1"/>
+                      </a:solidFill>
+                      <a:prstDash val="solid"/>
+                      <a:round/>
+                      <a:headEnd type="none" w="med" len="med"/>
+                      <a:tailEnd type="none" w="med" len="med"/>
+                    </a:lnR>
+                    <a:lnT w="12700" cap="flat" cmpd="sng" algn="ctr">
+                      <a:solidFill>
+                        <a:schemeClr val="tx1"/>
+                      </a:solidFill>
+                      <a:prstDash val="solid"/>
+                      <a:round/>
+                      <a:headEnd type="none" w="med" len="med"/>
+                      <a:tailEnd type="none" w="med" len="med"/>
+                    </a:lnT>
+                    <a:lnB w="12700" cap="flat" cmpd="sng" algn="ctr">
+                      <a:solidFill>
+                        <a:schemeClr val="tx1"/>
+                      </a:solidFill>
+                      <a:prstDash val="solid"/>
+                      <a:round/>
+                      <a:headEnd type="none" w="med" len="med"/>
+                      <a:tailEnd type="none" w="med" len="med"/>
+                    </a:lnB>
+                    <a:lnTlToBr w="12700" cmpd="sng">
+                      <a:noFill/>
+                      <a:prstDash val="solid"/>
+                    </a:lnTlToBr>
+                    <a:lnBlToTr w="12700" cmpd="sng">
+                      <a:noFill/>
+                      <a:prstDash val="solid"/>
+                    </a:lnBlToTr>
+                    <a:noFill/>
+                  </a:tcPr>
+                </a:tc>
+                <a:extLst>
+                  <a:ext uri="{0D108BD9-81ED-4DB2-BD59-A6C34878D82A}">
+                    <a16:rowId xmlns:a16="http://schemas.microsoft.com/office/drawing/2014/main" val="3079394240"/>
+                  </a:ext>
+                </a:extLst>
+              </a:tr>
+            </a:tbl>
+          </a:graphicData>
+        </a:graphic>
+      </p:graphicFrame>
+      <p:graphicFrame>
+        <p:nvGraphicFramePr>
+          <p:cNvPr id="7" name="Table 6">
+            <a:extLst>
+              <a:ext uri="{FF2B5EF4-FFF2-40B4-BE49-F238E27FC236}">
+                <a16:creationId xmlns:a16="http://schemas.microsoft.com/office/drawing/2014/main" id="{F55E9BE7-B268-A2FF-5CEE-5C6AE9E20570}"/>
+              </a:ext>
+            </a:extLst>
+          </p:cNvPr>
+          <p:cNvGraphicFramePr>
+            <a:graphicFrameLocks noGrp="1"/>
+          </p:cNvGraphicFramePr>
+          <p:nvPr>
+            <p:extLst>
+              <p:ext uri="{D42A27DB-BD31-4B8C-83A1-F6EECF244321}">
+                <p14:modId xmlns:p14="http://schemas.microsoft.com/office/powerpoint/2010/main" val="1251801835"/>
+              </p:ext>
+            </p:extLst>
+          </p:nvPr>
+        </p:nvGraphicFramePr>
+        <p:xfrm>
+          <a:off x="2681142" y="2331210"/>
+          <a:ext cx="4769980" cy="274320"/>
+        </p:xfrm>
+        <a:graphic>
+          <a:graphicData uri="http://schemas.openxmlformats.org/drawingml/2006/table">
+            <a:tbl>
+              <a:tblPr firstRow="1" bandRow="1">
+                <a:tableStyleId>{5C22544A-7EE6-4342-B048-85BDC9FD1C3A}</a:tableStyleId>
+              </a:tblPr>
+              <a:tblGrid>
+                <a:gridCol w="953996">
+                  <a:extLst>
+                    <a:ext uri="{9D8B030D-6E8A-4147-A177-3AD203B41FA5}">
+                      <a16:colId xmlns:a16="http://schemas.microsoft.com/office/drawing/2014/main" val="775975800"/>
+                    </a:ext>
+                  </a:extLst>
+                </a:gridCol>
+                <a:gridCol w="953996">
+                  <a:extLst>
+                    <a:ext uri="{9D8B030D-6E8A-4147-A177-3AD203B41FA5}">
+                      <a16:colId xmlns:a16="http://schemas.microsoft.com/office/drawing/2014/main" val="2859882136"/>
+                    </a:ext>
+                  </a:extLst>
+                </a:gridCol>
+                <a:gridCol w="953996">
+                  <a:extLst>
+                    <a:ext uri="{9D8B030D-6E8A-4147-A177-3AD203B41FA5}">
+                      <a16:colId xmlns:a16="http://schemas.microsoft.com/office/drawing/2014/main" val="487424312"/>
+                    </a:ext>
+                  </a:extLst>
+                </a:gridCol>
+                <a:gridCol w="953996">
+                  <a:extLst>
+                    <a:ext uri="{9D8B030D-6E8A-4147-A177-3AD203B41FA5}">
+                      <a16:colId xmlns:a16="http://schemas.microsoft.com/office/drawing/2014/main" val="2536831759"/>
+                    </a:ext>
+                  </a:extLst>
+                </a:gridCol>
+                <a:gridCol w="953996">
+                  <a:extLst>
+                    <a:ext uri="{9D8B030D-6E8A-4147-A177-3AD203B41FA5}">
+                      <a16:colId xmlns:a16="http://schemas.microsoft.com/office/drawing/2014/main" val="4138334116"/>
+                    </a:ext>
+                  </a:extLst>
+                </a:gridCol>
+              </a:tblGrid>
+              <a:tr h="0">
+                <a:tc>
+                  <a:txBody>
+                    <a:bodyPr/>
+                    <a:lstStyle/>
+                    <a:p>
+                      <a:r>
+                        <a:rPr lang="en-CN" sz="1200" dirty="0">
+                          <a:solidFill>
+                            <a:schemeClr val="tx1"/>
+                          </a:solidFill>
+                        </a:rPr>
+                        <a:t>Name</a:t>
+                      </a:r>
+                    </a:p>
+                  </a:txBody>
+                  <a:tcPr>
+                    <a:lnL w="12700" cap="flat" cmpd="sng" algn="ctr">
+                      <a:solidFill>
+                        <a:schemeClr val="tx1"/>
+                      </a:solidFill>
+                      <a:prstDash val="solid"/>
+                      <a:round/>
+                      <a:headEnd type="none" w="med" len="med"/>
+                      <a:tailEnd type="none" w="med" len="med"/>
+                    </a:lnL>
+                    <a:lnR w="12700" cap="flat" cmpd="sng" algn="ctr">
+                      <a:solidFill>
+                        <a:schemeClr val="tx1"/>
+                      </a:solidFill>
+                      <a:prstDash val="solid"/>
+                      <a:round/>
+                      <a:headEnd type="none" w="med" len="med"/>
+                      <a:tailEnd type="none" w="med" len="med"/>
+                    </a:lnR>
+                    <a:lnT w="12700" cap="flat" cmpd="sng" algn="ctr">
+                      <a:solidFill>
+                        <a:schemeClr val="tx1"/>
+                      </a:solidFill>
+                      <a:prstDash val="solid"/>
+                      <a:round/>
+                      <a:headEnd type="none" w="med" len="med"/>
+                      <a:tailEnd type="none" w="med" len="med"/>
+                    </a:lnT>
+                    <a:lnB w="12700" cap="flat" cmpd="sng" algn="ctr">
+                      <a:solidFill>
+                        <a:schemeClr val="tx1"/>
+                      </a:solidFill>
+                      <a:prstDash val="solid"/>
+                      <a:round/>
+                      <a:headEnd type="none" w="med" len="med"/>
+                      <a:tailEnd type="none" w="med" len="med"/>
+                    </a:lnB>
+                    <a:solidFill>
+                      <a:schemeClr val="accent2"/>
+                    </a:solidFill>
+                  </a:tcPr>
+                </a:tc>
+                <a:tc>
+                  <a:txBody>
+                    <a:bodyPr/>
+                    <a:lstStyle/>
+                    <a:p>
+                      <a:r>
+                        <a:rPr lang="en-US" sz="1200" dirty="0">
+                          <a:solidFill>
+                            <a:schemeClr val="tx1"/>
+                          </a:solidFill>
+                        </a:rPr>
+                        <a:t>L</a:t>
+                      </a:r>
+                      <a:r>
+                        <a:rPr lang="en-CN" sz="1200" dirty="0">
+                          <a:solidFill>
+                            <a:schemeClr val="tx1"/>
+                          </a:solidFill>
+                        </a:rPr>
+                        <a:t>anguage</a:t>
+                      </a:r>
+                    </a:p>
+                  </a:txBody>
+                  <a:tcPr>
+                    <a:lnL w="12700" cap="flat" cmpd="sng" algn="ctr">
+                      <a:solidFill>
+                        <a:schemeClr val="tx1"/>
+                      </a:solidFill>
+                      <a:prstDash val="solid"/>
+                      <a:round/>
+                      <a:headEnd type="none" w="med" len="med"/>
+                      <a:tailEnd type="none" w="med" len="med"/>
+                    </a:lnL>
+                    <a:lnR w="12700" cap="flat" cmpd="sng" algn="ctr">
+                      <a:solidFill>
+                        <a:schemeClr val="tx1"/>
+                      </a:solidFill>
+                      <a:prstDash val="solid"/>
+                      <a:round/>
+                      <a:headEnd type="none" w="med" len="med"/>
+                      <a:tailEnd type="none" w="med" len="med"/>
+                    </a:lnR>
+                    <a:lnT w="12700" cap="flat" cmpd="sng" algn="ctr">
+                      <a:solidFill>
+                        <a:schemeClr val="tx1"/>
+                      </a:solidFill>
+                      <a:prstDash val="solid"/>
+                      <a:round/>
+                      <a:headEnd type="none" w="med" len="med"/>
+                      <a:tailEnd type="none" w="med" len="med"/>
+                    </a:lnT>
+                    <a:lnB w="12700" cap="flat" cmpd="sng" algn="ctr">
+                      <a:solidFill>
+                        <a:schemeClr val="tx1"/>
+                      </a:solidFill>
+                      <a:prstDash val="solid"/>
+                      <a:round/>
+                      <a:headEnd type="none" w="med" len="med"/>
+                      <a:tailEnd type="none" w="med" len="med"/>
+                    </a:lnB>
+                    <a:noFill/>
+                  </a:tcPr>
+                </a:tc>
+                <a:tc>
+                  <a:txBody>
+                    <a:bodyPr/>
+                    <a:lstStyle/>
+                    <a:p>
+                      <a:r>
+                        <a:rPr lang="en-US" sz="1200" dirty="0">
+                          <a:solidFill>
+                            <a:schemeClr val="tx1"/>
+                          </a:solidFill>
+                        </a:rPr>
+                        <a:t>S</a:t>
+                      </a:r>
+                      <a:r>
+                        <a:rPr lang="en-CN" sz="1200" dirty="0">
+                          <a:solidFill>
+                            <a:schemeClr val="tx1"/>
+                          </a:solidFill>
+                        </a:rPr>
+                        <a:t>tart</a:t>
+                      </a:r>
+                    </a:p>
+                  </a:txBody>
+                  <a:tcPr>
+                    <a:lnL w="12700" cap="flat" cmpd="sng" algn="ctr">
+                      <a:solidFill>
+                        <a:schemeClr val="tx1"/>
+                      </a:solidFill>
+                      <a:prstDash val="solid"/>
+                      <a:round/>
+                      <a:headEnd type="none" w="med" len="med"/>
+                      <a:tailEnd type="none" w="med" len="med"/>
+                    </a:lnL>
+                    <a:lnR w="12700" cap="flat" cmpd="sng" algn="ctr">
+                      <a:solidFill>
+                        <a:schemeClr val="tx1"/>
+                      </a:solidFill>
+                      <a:prstDash val="solid"/>
+                      <a:round/>
+                      <a:headEnd type="none" w="med" len="med"/>
+                      <a:tailEnd type="none" w="med" len="med"/>
+                    </a:lnR>
+                    <a:lnT w="12700" cap="flat" cmpd="sng" algn="ctr">
+                      <a:solidFill>
+                        <a:schemeClr val="tx1"/>
+                      </a:solidFill>
+                      <a:prstDash val="solid"/>
+                      <a:round/>
+                      <a:headEnd type="none" w="med" len="med"/>
+                      <a:tailEnd type="none" w="med" len="med"/>
+                    </a:lnT>
+                    <a:lnB w="12700" cap="flat" cmpd="sng" algn="ctr">
+                      <a:solidFill>
+                        <a:schemeClr val="tx1"/>
+                      </a:solidFill>
+                      <a:prstDash val="solid"/>
+                      <a:round/>
+                      <a:headEnd type="none" w="med" len="med"/>
+                      <a:tailEnd type="none" w="med" len="med"/>
+                    </a:lnB>
+                    <a:solidFill>
+                      <a:schemeClr val="accent2"/>
+                    </a:solidFill>
+                  </a:tcPr>
+                </a:tc>
+                <a:tc>
+                  <a:txBody>
+                    <a:bodyPr/>
+                    <a:lstStyle/>
+                    <a:p>
+                      <a:r>
+                        <a:rPr lang="en-CN" sz="1200" dirty="0">
+                          <a:solidFill>
+                            <a:schemeClr val="tx1"/>
+                          </a:solidFill>
+                        </a:rPr>
+                        <a:t>Date</a:t>
+                      </a:r>
+                    </a:p>
+                  </a:txBody>
+                  <a:tcPr>
+                    <a:lnL w="12700" cap="flat" cmpd="sng" algn="ctr">
+                      <a:solidFill>
+                        <a:schemeClr val="tx1"/>
+                      </a:solidFill>
+                      <a:prstDash val="solid"/>
+                      <a:round/>
+                      <a:headEnd type="none" w="med" len="med"/>
+                      <a:tailEnd type="none" w="med" len="med"/>
+                    </a:lnL>
+                    <a:lnR w="12700" cap="flat" cmpd="sng" algn="ctr">
+                      <a:solidFill>
+                        <a:schemeClr val="tx1"/>
+                      </a:solidFill>
+                      <a:prstDash val="solid"/>
+                      <a:round/>
+                      <a:headEnd type="none" w="med" len="med"/>
+                      <a:tailEnd type="none" w="med" len="med"/>
+                    </a:lnR>
+                    <a:lnT w="12700" cap="flat" cmpd="sng" algn="ctr">
+                      <a:solidFill>
+                        <a:schemeClr val="tx1"/>
+                      </a:solidFill>
+                      <a:prstDash val="solid"/>
+                      <a:round/>
+                      <a:headEnd type="none" w="med" len="med"/>
+                      <a:tailEnd type="none" w="med" len="med"/>
+                    </a:lnT>
+                    <a:lnB w="12700" cap="flat" cmpd="sng" algn="ctr">
+                      <a:solidFill>
+                        <a:schemeClr val="tx1"/>
+                      </a:solidFill>
+                      <a:prstDash val="solid"/>
+                      <a:round/>
+                      <a:headEnd type="none" w="med" len="med"/>
+                      <a:tailEnd type="none" w="med" len="med"/>
+                    </a:lnB>
+                    <a:solidFill>
+                      <a:schemeClr val="accent2"/>
+                    </a:solidFill>
+                  </a:tcPr>
+                </a:tc>
+                <a:tc>
+                  <a:txBody>
+                    <a:bodyPr/>
+                    <a:lstStyle/>
+                    <a:p>
+                      <a:r>
+                        <a:rPr lang="en-CN" sz="1200" dirty="0">
+                          <a:solidFill>
+                            <a:schemeClr val="tx1"/>
+                          </a:solidFill>
+                        </a:rPr>
+                        <a:t>passCount</a:t>
+                      </a:r>
+                    </a:p>
+                  </a:txBody>
+                  <a:tcPr>
+                    <a:lnL w="12700" cap="flat" cmpd="sng" algn="ctr">
+                      <a:solidFill>
+                        <a:schemeClr val="tx1"/>
+                      </a:solidFill>
+                      <a:prstDash val="solid"/>
+                      <a:round/>
+                      <a:headEnd type="none" w="med" len="med"/>
+                      <a:tailEnd type="none" w="med" len="med"/>
+                    </a:lnL>
+                    <a:lnR w="12700" cap="flat" cmpd="sng" algn="ctr">
+                      <a:solidFill>
+                        <a:schemeClr val="tx1"/>
+                      </a:solidFill>
+                      <a:prstDash val="solid"/>
+                      <a:round/>
+                      <a:headEnd type="none" w="med" len="med"/>
+                      <a:tailEnd type="none" w="med" len="med"/>
+                    </a:lnR>
+                    <a:lnT w="12700" cap="flat" cmpd="sng" algn="ctr">
+                      <a:solidFill>
+                        <a:schemeClr val="tx1"/>
+                      </a:solidFill>
+                      <a:prstDash val="solid"/>
+                      <a:round/>
+                      <a:headEnd type="none" w="med" len="med"/>
+                      <a:tailEnd type="none" w="med" len="med"/>
+                    </a:lnT>
+                    <a:lnB w="12700" cap="flat" cmpd="sng" algn="ctr">
+                      <a:solidFill>
+                        <a:schemeClr val="tx1"/>
+                      </a:solidFill>
+                      <a:prstDash val="solid"/>
+                      <a:round/>
+                      <a:headEnd type="none" w="med" len="med"/>
+                      <a:tailEnd type="none" w="med" len="med"/>
+                    </a:lnB>
+                    <a:solidFill>
+                      <a:schemeClr val="accent2"/>
+                    </a:solidFill>
+                  </a:tcPr>
+                </a:tc>
+                <a:extLst>
+                  <a:ext uri="{0D108BD9-81ED-4DB2-BD59-A6C34878D82A}">
+                    <a16:rowId xmlns:a16="http://schemas.microsoft.com/office/drawing/2014/main" val="3445340716"/>
+                  </a:ext>
+                </a:extLst>
+              </a:tr>
+            </a:tbl>
+          </a:graphicData>
+        </a:graphic>
+      </p:graphicFrame>
+      <p:graphicFrame>
+        <p:nvGraphicFramePr>
+          <p:cNvPr id="8" name="Table 7">
+            <a:extLst>
+              <a:ext uri="{FF2B5EF4-FFF2-40B4-BE49-F238E27FC236}">
+                <a16:creationId xmlns:a16="http://schemas.microsoft.com/office/drawing/2014/main" id="{257A7003-ADC6-C1DA-8C73-C86E61B586CF}"/>
+              </a:ext>
+            </a:extLst>
+          </p:cNvPr>
+          <p:cNvGraphicFramePr>
+            <a:graphicFrameLocks noGrp="1"/>
+          </p:cNvGraphicFramePr>
+          <p:nvPr>
+            <p:extLst>
+              <p:ext uri="{D42A27DB-BD31-4B8C-83A1-F6EECF244321}">
+                <p14:modId xmlns:p14="http://schemas.microsoft.com/office/powerpoint/2010/main" val="1223481605"/>
+              </p:ext>
+            </p:extLst>
+          </p:nvPr>
+        </p:nvGraphicFramePr>
+        <p:xfrm>
+          <a:off x="2681143" y="3891111"/>
+          <a:ext cx="6071940" cy="274320"/>
+        </p:xfrm>
+        <a:graphic>
+          <a:graphicData uri="http://schemas.openxmlformats.org/drawingml/2006/table">
+            <a:tbl>
+              <a:tblPr firstRow="1" bandRow="1">
+                <a:tableStyleId>{5C22544A-7EE6-4342-B048-85BDC9FD1C3A}</a:tableStyleId>
+              </a:tblPr>
+              <a:tblGrid>
+                <a:gridCol w="1011990">
+                  <a:extLst>
+                    <a:ext uri="{9D8B030D-6E8A-4147-A177-3AD203B41FA5}">
+                      <a16:colId xmlns:a16="http://schemas.microsoft.com/office/drawing/2014/main" val="775975800"/>
+                    </a:ext>
+                  </a:extLst>
+                </a:gridCol>
+                <a:gridCol w="1011990">
+                  <a:extLst>
+                    <a:ext uri="{9D8B030D-6E8A-4147-A177-3AD203B41FA5}">
+                      <a16:colId xmlns:a16="http://schemas.microsoft.com/office/drawing/2014/main" val="2859882136"/>
+                    </a:ext>
+                  </a:extLst>
+                </a:gridCol>
+                <a:gridCol w="1011990">
+                  <a:extLst>
+                    <a:ext uri="{9D8B030D-6E8A-4147-A177-3AD203B41FA5}">
+                      <a16:colId xmlns:a16="http://schemas.microsoft.com/office/drawing/2014/main" val="2480661890"/>
+                    </a:ext>
+                  </a:extLst>
+                </a:gridCol>
+                <a:gridCol w="1011990">
+                  <a:extLst>
+                    <a:ext uri="{9D8B030D-6E8A-4147-A177-3AD203B41FA5}">
+                      <a16:colId xmlns:a16="http://schemas.microsoft.com/office/drawing/2014/main" val="2536831759"/>
+                    </a:ext>
+                  </a:extLst>
+                </a:gridCol>
+                <a:gridCol w="1011990">
+                  <a:extLst>
+                    <a:ext uri="{9D8B030D-6E8A-4147-A177-3AD203B41FA5}">
+                      <a16:colId xmlns:a16="http://schemas.microsoft.com/office/drawing/2014/main" val="2450884560"/>
+                    </a:ext>
+                  </a:extLst>
+                </a:gridCol>
+                <a:gridCol w="1011990">
+                  <a:extLst>
+                    <a:ext uri="{9D8B030D-6E8A-4147-A177-3AD203B41FA5}">
+                      <a16:colId xmlns:a16="http://schemas.microsoft.com/office/drawing/2014/main" val="37746477"/>
+                    </a:ext>
+                  </a:extLst>
+                </a:gridCol>
+              </a:tblGrid>
+              <a:tr h="0">
+                <a:tc>
+                  <a:txBody>
+                    <a:bodyPr/>
+                    <a:lstStyle/>
+                    <a:p>
+                      <a:r>
+                        <a:rPr lang="en-CN" sz="1200" dirty="0">
+                          <a:solidFill>
+                            <a:schemeClr val="tx1"/>
+                          </a:solidFill>
+                        </a:rPr>
+                        <a:t>Spell</a:t>
+                      </a:r>
+                    </a:p>
+                  </a:txBody>
+                  <a:tcPr>
+                    <a:lnL w="12700" cap="flat" cmpd="sng" algn="ctr">
+                      <a:solidFill>
+                        <a:schemeClr val="tx1"/>
+                      </a:solidFill>
+                      <a:prstDash val="solid"/>
+                      <a:round/>
+                      <a:headEnd type="none" w="med" len="med"/>
+                      <a:tailEnd type="none" w="med" len="med"/>
+                    </a:lnL>
+                    <a:lnR w="12700" cap="flat" cmpd="sng" algn="ctr">
+                      <a:solidFill>
+                        <a:schemeClr val="tx1"/>
+                      </a:solidFill>
+                      <a:prstDash val="solid"/>
+                      <a:round/>
+                      <a:headEnd type="none" w="med" len="med"/>
+                      <a:tailEnd type="none" w="med" len="med"/>
+                    </a:lnR>
+                    <a:lnT w="12700" cap="flat" cmpd="sng" algn="ctr">
+                      <a:solidFill>
+                        <a:schemeClr val="tx1"/>
+                      </a:solidFill>
+                      <a:prstDash val="solid"/>
+                      <a:round/>
+                      <a:headEnd type="none" w="med" len="med"/>
+                      <a:tailEnd type="none" w="med" len="med"/>
+                    </a:lnT>
+                    <a:lnB w="12700" cap="flat" cmpd="sng" algn="ctr">
+                      <a:solidFill>
+                        <a:schemeClr val="tx1"/>
+                      </a:solidFill>
+                      <a:prstDash val="solid"/>
+                      <a:round/>
+                      <a:headEnd type="none" w="med" len="med"/>
+                      <a:tailEnd type="none" w="med" len="med"/>
+                    </a:lnB>
+                    <a:noFill/>
+                  </a:tcPr>
+                </a:tc>
+                <a:tc>
+                  <a:txBody>
+                    <a:bodyPr/>
+                    <a:lstStyle/>
+                    <a:p>
+                      <a:r>
+                        <a:rPr lang="en-CN" sz="1200" dirty="0">
+                          <a:solidFill>
+                            <a:schemeClr val="tx1"/>
+                          </a:solidFill>
+                        </a:rPr>
+                        <a:t>passCount</a:t>
+                      </a:r>
+                    </a:p>
+                  </a:txBody>
+                  <a:tcPr>
+                    <a:lnL w="12700" cap="flat" cmpd="sng" algn="ctr">
+                      <a:solidFill>
+                        <a:schemeClr val="tx1"/>
+                      </a:solidFill>
+                      <a:prstDash val="solid"/>
+                      <a:round/>
+                      <a:headEnd type="none" w="med" len="med"/>
+                      <a:tailEnd type="none" w="med" len="med"/>
+                    </a:lnL>
+                    <a:lnR w="12700" cap="flat" cmpd="sng" algn="ctr">
+                      <a:solidFill>
+                        <a:schemeClr val="tx1"/>
+                      </a:solidFill>
+                      <a:prstDash val="solid"/>
+                      <a:round/>
+                      <a:headEnd type="none" w="med" len="med"/>
+                      <a:tailEnd type="none" w="med" len="med"/>
+                    </a:lnR>
+                    <a:lnT w="12700" cap="flat" cmpd="sng" algn="ctr">
+                      <a:solidFill>
+                        <a:schemeClr val="tx1"/>
+                      </a:solidFill>
+                      <a:prstDash val="solid"/>
+                      <a:round/>
+                      <a:headEnd type="none" w="med" len="med"/>
+                      <a:tailEnd type="none" w="med" len="med"/>
+                    </a:lnT>
+                    <a:lnB w="12700" cap="flat" cmpd="sng" algn="ctr">
+                      <a:solidFill>
+                        <a:schemeClr val="tx1"/>
+                      </a:solidFill>
+                      <a:prstDash val="solid"/>
+                      <a:round/>
+                      <a:headEnd type="none" w="med" len="med"/>
+                      <a:tailEnd type="none" w="med" len="med"/>
+                    </a:lnB>
+                    <a:solidFill>
+                      <a:schemeClr val="accent2"/>
+                    </a:solidFill>
+                  </a:tcPr>
+                </a:tc>
+                <a:tc>
+                  <a:txBody>
+                    <a:bodyPr/>
+                    <a:lstStyle/>
+                    <a:p>
+                      <a:r>
+                        <a:rPr lang="en-CN" sz="1200" dirty="0">
+                          <a:solidFill>
+                            <a:schemeClr val="tx1"/>
+                          </a:solidFill>
+                        </a:rPr>
+                        <a:t>ImageNo</a:t>
+                      </a:r>
+                    </a:p>
+                  </a:txBody>
+                  <a:tcPr>
+                    <a:lnL w="12700" cap="flat" cmpd="sng" algn="ctr">
+                      <a:solidFill>
+                        <a:schemeClr val="tx1"/>
+                      </a:solidFill>
+                      <a:prstDash val="solid"/>
+                      <a:round/>
+                      <a:headEnd type="none" w="med" len="med"/>
+                      <a:tailEnd type="none" w="med" len="med"/>
+                    </a:lnL>
+                    <a:lnR w="12700" cap="flat" cmpd="sng" algn="ctr">
+                      <a:solidFill>
+                        <a:schemeClr val="tx1"/>
+                      </a:solidFill>
+                      <a:prstDash val="solid"/>
+                      <a:round/>
+                      <a:headEnd type="none" w="med" len="med"/>
+                      <a:tailEnd type="none" w="med" len="med"/>
+                    </a:lnR>
+                    <a:lnT w="12700" cap="flat" cmpd="sng" algn="ctr">
+                      <a:solidFill>
+                        <a:schemeClr val="tx1"/>
+                      </a:solidFill>
+                      <a:prstDash val="solid"/>
+                      <a:round/>
+                      <a:headEnd type="none" w="med" len="med"/>
+                      <a:tailEnd type="none" w="med" len="med"/>
+                    </a:lnT>
+                    <a:lnB w="12700" cap="flat" cmpd="sng" algn="ctr">
+                      <a:solidFill>
+                        <a:schemeClr val="tx1"/>
+                      </a:solidFill>
+                      <a:prstDash val="solid"/>
+                      <a:round/>
+                      <a:headEnd type="none" w="med" len="med"/>
+                      <a:tailEnd type="none" w="med" len="med"/>
+                    </a:lnB>
+                    <a:solidFill>
+                      <a:schemeClr val="accent2"/>
+                    </a:solidFill>
+                  </a:tcPr>
+                </a:tc>
+                <a:tc>
+                  <a:txBody>
+                    <a:bodyPr/>
+                    <a:lstStyle/>
+                    <a:p>
+                      <a:r>
+                        <a:rPr lang="en-US" sz="1200" dirty="0">
+                          <a:solidFill>
+                            <a:schemeClr val="tx1"/>
+                          </a:solidFill>
+                        </a:rPr>
+                        <a:t>T</a:t>
+                      </a:r>
+                      <a:r>
+                        <a:rPr lang="en-CN" sz="1200" dirty="0">
+                          <a:solidFill>
+                            <a:schemeClr val="tx1"/>
+                          </a:solidFill>
+                        </a:rPr>
+                        <a:t>ype</a:t>
+                      </a:r>
+                    </a:p>
+                  </a:txBody>
+                  <a:tcPr>
+                    <a:lnL w="12700" cap="flat" cmpd="sng" algn="ctr">
+                      <a:solidFill>
+                        <a:schemeClr val="tx1"/>
+                      </a:solidFill>
+                      <a:prstDash val="solid"/>
+                      <a:round/>
+                      <a:headEnd type="none" w="med" len="med"/>
+                      <a:tailEnd type="none" w="med" len="med"/>
+                    </a:lnL>
+                    <a:lnR w="12700" cap="flat" cmpd="sng" algn="ctr">
+                      <a:solidFill>
+                        <a:schemeClr val="tx1"/>
+                      </a:solidFill>
+                      <a:prstDash val="solid"/>
+                      <a:round/>
+                      <a:headEnd type="none" w="med" len="med"/>
+                      <a:tailEnd type="none" w="med" len="med"/>
+                    </a:lnR>
+                    <a:lnT w="12700" cap="flat" cmpd="sng" algn="ctr">
+                      <a:solidFill>
+                        <a:schemeClr val="tx1"/>
+                      </a:solidFill>
+                      <a:prstDash val="solid"/>
+                      <a:round/>
+                      <a:headEnd type="none" w="med" len="med"/>
+                      <a:tailEnd type="none" w="med" len="med"/>
+                    </a:lnT>
+                    <a:lnB w="12700" cap="flat" cmpd="sng" algn="ctr">
+                      <a:solidFill>
+                        <a:schemeClr val="tx1"/>
+                      </a:solidFill>
+                      <a:prstDash val="solid"/>
+                      <a:round/>
+                      <a:headEnd type="none" w="med" len="med"/>
+                      <a:tailEnd type="none" w="med" len="med"/>
+                    </a:lnB>
+                    <a:noFill/>
+                  </a:tcPr>
+                </a:tc>
+                <a:tc>
+                  <a:txBody>
+                    <a:bodyPr/>
+                    <a:lstStyle/>
+                    <a:p>
+                      <a:r>
+                        <a:rPr lang="en-CN" sz="1200" dirty="0">
+                          <a:solidFill>
+                            <a:schemeClr val="tx1"/>
+                          </a:solidFill>
+                        </a:rPr>
+                        <a:t>TypeNo</a:t>
+                      </a:r>
+                    </a:p>
+                  </a:txBody>
+                  <a:tcPr>
+                    <a:lnL w="12700" cap="flat" cmpd="sng" algn="ctr">
+                      <a:solidFill>
+                        <a:schemeClr val="tx1"/>
+                      </a:solidFill>
+                      <a:prstDash val="solid"/>
+                      <a:round/>
+                      <a:headEnd type="none" w="med" len="med"/>
+                      <a:tailEnd type="none" w="med" len="med"/>
+                    </a:lnL>
+                    <a:lnR w="12700" cap="flat" cmpd="sng" algn="ctr">
+                      <a:solidFill>
+                        <a:schemeClr val="tx1"/>
+                      </a:solidFill>
+                      <a:prstDash val="solid"/>
+                      <a:round/>
+                      <a:headEnd type="none" w="med" len="med"/>
+                      <a:tailEnd type="none" w="med" len="med"/>
+                    </a:lnR>
+                    <a:lnT w="12700" cap="flat" cmpd="sng" algn="ctr">
+                      <a:solidFill>
+                        <a:schemeClr val="tx1"/>
+                      </a:solidFill>
+                      <a:prstDash val="solid"/>
+                      <a:round/>
+                      <a:headEnd type="none" w="med" len="med"/>
+                      <a:tailEnd type="none" w="med" len="med"/>
+                    </a:lnT>
+                    <a:lnB w="12700" cap="flat" cmpd="sng" algn="ctr">
+                      <a:solidFill>
+                        <a:schemeClr val="tx1"/>
+                      </a:solidFill>
+                      <a:prstDash val="solid"/>
+                      <a:round/>
+                      <a:headEnd type="none" w="med" len="med"/>
+                      <a:tailEnd type="none" w="med" len="med"/>
+                    </a:lnB>
+                    <a:noFill/>
+                  </a:tcPr>
+                </a:tc>
+                <a:tc>
+                  <a:txBody>
+                    <a:bodyPr/>
+                    <a:lstStyle/>
+                    <a:p>
+                      <a:r>
+                        <a:rPr lang="en-CN" sz="1200" dirty="0">
+                          <a:solidFill>
+                            <a:schemeClr val="tx1"/>
+                          </a:solidFill>
+                        </a:rPr>
+                        <a:t>Tag</a:t>
+                      </a:r>
+                    </a:p>
+                  </a:txBody>
+                  <a:tcPr>
+                    <a:lnL w="12700" cap="flat" cmpd="sng" algn="ctr">
+                      <a:solidFill>
+                        <a:schemeClr val="tx1"/>
+                      </a:solidFill>
+                      <a:prstDash val="solid"/>
+                      <a:round/>
+                      <a:headEnd type="none" w="med" len="med"/>
+                      <a:tailEnd type="none" w="med" len="med"/>
+                    </a:lnL>
+                    <a:lnR w="12700" cap="flat" cmpd="sng" algn="ctr">
+                      <a:solidFill>
+                        <a:schemeClr val="tx1"/>
+                      </a:solidFill>
+                      <a:prstDash val="solid"/>
+                      <a:round/>
+                      <a:headEnd type="none" w="med" len="med"/>
+                      <a:tailEnd type="none" w="med" len="med"/>
+                    </a:lnR>
+                    <a:lnT w="12700" cap="flat" cmpd="sng" algn="ctr">
+                      <a:solidFill>
+                        <a:schemeClr val="tx1"/>
+                      </a:solidFill>
+                      <a:prstDash val="solid"/>
+                      <a:round/>
+                      <a:headEnd type="none" w="med" len="med"/>
+                      <a:tailEnd type="none" w="med" len="med"/>
+                    </a:lnT>
+                    <a:lnB w="12700" cap="flat" cmpd="sng" algn="ctr">
+                      <a:solidFill>
+                        <a:schemeClr val="tx1"/>
+                      </a:solidFill>
+                      <a:prstDash val="solid"/>
+                      <a:round/>
+                      <a:headEnd type="none" w="med" len="med"/>
+                      <a:tailEnd type="none" w="med" len="med"/>
+                    </a:lnB>
+                    <a:solidFill>
+                      <a:schemeClr val="accent2"/>
+                    </a:solidFill>
+                  </a:tcPr>
+                </a:tc>
+                <a:extLst>
+                  <a:ext uri="{0D108BD9-81ED-4DB2-BD59-A6C34878D82A}">
+                    <a16:rowId xmlns:a16="http://schemas.microsoft.com/office/drawing/2014/main" val="3445340716"/>
+                  </a:ext>
+                </a:extLst>
+              </a:tr>
+            </a:tbl>
+          </a:graphicData>
+        </a:graphic>
+      </p:graphicFrame>
+      <p:sp>
+        <p:nvSpPr>
+          <p:cNvPr id="9" name="TextBox 8">
+            <a:extLst>
+              <a:ext uri="{FF2B5EF4-FFF2-40B4-BE49-F238E27FC236}">
+                <a16:creationId xmlns:a16="http://schemas.microsoft.com/office/drawing/2014/main" id="{BED440A5-7257-22A4-E324-2D35DD90D813}"/>
+              </a:ext>
+            </a:extLst>
+          </p:cNvPr>
+          <p:cNvSpPr txBox="1"/>
+          <p:nvPr/>
+        </p:nvSpPr>
+        <p:spPr>
+          <a:xfrm>
+            <a:off x="5014677" y="135925"/>
+            <a:ext cx="702436" cy="461665"/>
+          </a:xfrm>
+          <a:prstGeom prst="rect">
+            <a:avLst/>
+          </a:prstGeom>
+          <a:noFill/>
+        </p:spPr>
+        <p:txBody>
+          <a:bodyPr wrap="none" rtlCol="0">
+            <a:spAutoFit/>
+          </a:bodyPr>
+          <a:lstStyle/>
+          <a:p>
+            <a:r>
+              <a:rPr lang="en-CN" sz="2400" dirty="0">
+                <a:highlight>
+                  <a:srgbClr val="FFFF00"/>
+                </a:highlight>
+              </a:rPr>
+              <a:t>Edit</a:t>
+            </a:r>
+          </a:p>
+        </p:txBody>
+      </p:sp>
+      <p:sp>
+        <p:nvSpPr>
+          <p:cNvPr id="10" name="TextBox 9">
+            <a:extLst>
+              <a:ext uri="{FF2B5EF4-FFF2-40B4-BE49-F238E27FC236}">
+                <a16:creationId xmlns:a16="http://schemas.microsoft.com/office/drawing/2014/main" id="{F149AA72-8852-E0D3-0B65-FD0B73C518B2}"/>
+              </a:ext>
+            </a:extLst>
+          </p:cNvPr>
+          <p:cNvSpPr txBox="1"/>
+          <p:nvPr/>
+        </p:nvSpPr>
+        <p:spPr>
+          <a:xfrm>
+            <a:off x="2681143" y="4460788"/>
+            <a:ext cx="6071940" cy="369332"/>
+          </a:xfrm>
+          <a:prstGeom prst="rect">
+            <a:avLst/>
+          </a:prstGeom>
+          <a:noFill/>
+        </p:spPr>
+        <p:txBody>
+          <a:bodyPr wrap="square" rtlCol="0">
+            <a:spAutoFit/>
+          </a:bodyPr>
+          <a:lstStyle/>
+          <a:p>
+            <a:r>
+              <a:rPr lang="en-CN" dirty="0"/>
+              <a:t>Spell: </a:t>
+            </a:r>
+          </a:p>
+        </p:txBody>
+      </p:sp>
+    </p:spTree>
+    <p:extLst>
+      <p:ext uri="{BB962C8B-B14F-4D97-AF65-F5344CB8AC3E}">
+        <p14:creationId xmlns:p14="http://schemas.microsoft.com/office/powerpoint/2010/main" val="1258520894"/>
+      </p:ext>
+    </p:extLst>
+  </p:cSld>
+  <p:clrMapOvr>
+    <a:masterClrMapping/>
+  </p:clrMapOvr>
+</p:sld>
+</file>
+
+<file path=ppt/slides/slide3.xml><?xml version="1.0" encoding="utf-8"?>
+<p:sld xmlns:a="http://schemas.openxmlformats.org/drawingml/2006/main" xmlns:r="http://schemas.openxmlformats.org/officeDocument/2006/relationships" xmlns:p="http://schemas.openxmlformats.org/presentationml/2006/main">
+  <p:cSld>
+    <p:spTree>
+      <p:nvGrpSpPr>
+        <p:cNvPr id="1" name=""/>
+        <p:cNvGrpSpPr/>
+        <p:nvPr/>
+      </p:nvGrpSpPr>
+      <p:grpSpPr>
+        <a:xfrm>
+          <a:off x="0" y="0"/>
+          <a:ext cx="0" cy="0"/>
+          <a:chOff x="0" y="0"/>
+          <a:chExt cx="0" cy="0"/>
+        </a:xfrm>
+      </p:grpSpPr>
+      <p:sp>
+        <p:nvSpPr>
+          <p:cNvPr id="4" name="TextBox 3">
+            <a:extLst>
+              <a:ext uri="{FF2B5EF4-FFF2-40B4-BE49-F238E27FC236}">
+                <a16:creationId xmlns:a16="http://schemas.microsoft.com/office/drawing/2014/main" id="{69565D19-E64E-41FE-C7F2-DC39ABD296D7}"/>
+              </a:ext>
+            </a:extLst>
+          </p:cNvPr>
+          <p:cNvSpPr txBox="1"/>
+          <p:nvPr/>
+        </p:nvSpPr>
+        <p:spPr>
+          <a:xfrm>
+            <a:off x="5150068" y="336331"/>
+            <a:ext cx="1351652" cy="369332"/>
+          </a:xfrm>
+          <a:prstGeom prst="rect">
+            <a:avLst/>
+          </a:prstGeom>
+          <a:noFill/>
+        </p:spPr>
+        <p:txBody>
+          <a:bodyPr wrap="none" rtlCol="0">
+            <a:spAutoFit/>
+          </a:bodyPr>
+          <a:lstStyle/>
+          <a:p>
+            <a:r>
+              <a:rPr lang="en-CN" dirty="0"/>
+              <a:t>Design Idea</a:t>
+            </a:r>
+          </a:p>
+        </p:txBody>
+      </p:sp>
+      <p:sp>
+        <p:nvSpPr>
+          <p:cNvPr id="5" name="Rounded Rectangle 4">
+            <a:extLst>
+              <a:ext uri="{FF2B5EF4-FFF2-40B4-BE49-F238E27FC236}">
+                <a16:creationId xmlns:a16="http://schemas.microsoft.com/office/drawing/2014/main" id="{327E773D-6C6E-D48F-6EF4-1D0EAD1AA9AE}"/>
+              </a:ext>
+            </a:extLst>
+          </p:cNvPr>
+          <p:cNvSpPr/>
+          <p:nvPr/>
+        </p:nvSpPr>
+        <p:spPr>
+          <a:xfrm>
+            <a:off x="1019503" y="861849"/>
+            <a:ext cx="1996966" cy="2175641"/>
+          </a:xfrm>
+          <a:prstGeom prst="roundRect">
+            <a:avLst/>
+          </a:prstGeom>
+          <a:noFill/>
+          <a:ln>
+            <a:solidFill>
+              <a:schemeClr val="accent4"/>
+            </a:solidFill>
+          </a:ln>
+        </p:spPr>
+        <p:style>
+          <a:lnRef idx="2">
+            <a:schemeClr val="accent1">
+              <a:shade val="15000"/>
+            </a:schemeClr>
+          </a:lnRef>
+          <a:fillRef idx="1">
+            <a:schemeClr val="accent1"/>
+          </a:fillRef>
+          <a:effectRef idx="0">
+            <a:schemeClr val="accent1"/>
+          </a:effectRef>
+          <a:fontRef idx="minor">
+            <a:schemeClr val="lt1"/>
+          </a:fontRef>
+        </p:style>
+        <p:txBody>
+          <a:bodyPr rtlCol="0" anchor="ctr"/>
+          <a:lstStyle/>
+          <a:p>
+            <a:pPr algn="ctr"/>
+            <a:endParaRPr lang="en-CN"/>
+          </a:p>
+        </p:txBody>
+      </p:sp>
+    </p:spTree>
+    <p:extLst>
+      <p:ext uri="{BB962C8B-B14F-4D97-AF65-F5344CB8AC3E}">
+        <p14:creationId xmlns:p14="http://schemas.microsoft.com/office/powerpoint/2010/main" val="2149802160"/>
       </p:ext>
     </p:extLst>
   </p:cSld>

--- a/design/hierarchy.pptx
+++ b/design/hierarchy.pptx
@@ -8,6 +8,9 @@
     <p:sldId id="256" r:id="rId2"/>
     <p:sldId id="257" r:id="rId3"/>
     <p:sldId id="258" r:id="rId4"/>
+    <p:sldId id="259" r:id="rId5"/>
+    <p:sldId id="260" r:id="rId6"/>
+    <p:sldId id="261" r:id="rId7"/>
   </p:sldIdLst>
   <p:sldSz cx="12192000" cy="6858000"/>
   <p:notesSz cx="6858000" cy="9144000"/>
@@ -263,7 +266,7 @@
           <a:p>
             <a:fld id="{5DD8AB15-54DA-BC48-9BAB-770E2E857439}" type="datetimeFigureOut">
               <a:rPr lang="en-CN" smtClean="0"/>
-              <a:t>2024/12/6</a:t>
+              <a:t>2025/1/7</a:t>
             </a:fld>
             <a:endParaRPr lang="en-CN"/>
           </a:p>
@@ -463,7 +466,7 @@
           <a:p>
             <a:fld id="{5DD8AB15-54DA-BC48-9BAB-770E2E857439}" type="datetimeFigureOut">
               <a:rPr lang="en-CN" smtClean="0"/>
-              <a:t>2024/12/6</a:t>
+              <a:t>2025/1/7</a:t>
             </a:fld>
             <a:endParaRPr lang="en-CN"/>
           </a:p>
@@ -673,7 +676,7 @@
           <a:p>
             <a:fld id="{5DD8AB15-54DA-BC48-9BAB-770E2E857439}" type="datetimeFigureOut">
               <a:rPr lang="en-CN" smtClean="0"/>
-              <a:t>2024/12/6</a:t>
+              <a:t>2025/1/7</a:t>
             </a:fld>
             <a:endParaRPr lang="en-CN"/>
           </a:p>
@@ -873,7 +876,7 @@
           <a:p>
             <a:fld id="{5DD8AB15-54DA-BC48-9BAB-770E2E857439}" type="datetimeFigureOut">
               <a:rPr lang="en-CN" smtClean="0"/>
-              <a:t>2024/12/6</a:t>
+              <a:t>2025/1/7</a:t>
             </a:fld>
             <a:endParaRPr lang="en-CN"/>
           </a:p>
@@ -1149,7 +1152,7 @@
           <a:p>
             <a:fld id="{5DD8AB15-54DA-BC48-9BAB-770E2E857439}" type="datetimeFigureOut">
               <a:rPr lang="en-CN" smtClean="0"/>
-              <a:t>2024/12/6</a:t>
+              <a:t>2025/1/7</a:t>
             </a:fld>
             <a:endParaRPr lang="en-CN"/>
           </a:p>
@@ -1417,7 +1420,7 @@
           <a:p>
             <a:fld id="{5DD8AB15-54DA-BC48-9BAB-770E2E857439}" type="datetimeFigureOut">
               <a:rPr lang="en-CN" smtClean="0"/>
-              <a:t>2024/12/6</a:t>
+              <a:t>2025/1/7</a:t>
             </a:fld>
             <a:endParaRPr lang="en-CN"/>
           </a:p>
@@ -1832,7 +1835,7 @@
           <a:p>
             <a:fld id="{5DD8AB15-54DA-BC48-9BAB-770E2E857439}" type="datetimeFigureOut">
               <a:rPr lang="en-CN" smtClean="0"/>
-              <a:t>2024/12/6</a:t>
+              <a:t>2025/1/7</a:t>
             </a:fld>
             <a:endParaRPr lang="en-CN"/>
           </a:p>
@@ -1974,7 +1977,7 @@
           <a:p>
             <a:fld id="{5DD8AB15-54DA-BC48-9BAB-770E2E857439}" type="datetimeFigureOut">
               <a:rPr lang="en-CN" smtClean="0"/>
-              <a:t>2024/12/6</a:t>
+              <a:t>2025/1/7</a:t>
             </a:fld>
             <a:endParaRPr lang="en-CN"/>
           </a:p>
@@ -2087,7 +2090,7 @@
           <a:p>
             <a:fld id="{5DD8AB15-54DA-BC48-9BAB-770E2E857439}" type="datetimeFigureOut">
               <a:rPr lang="en-CN" smtClean="0"/>
-              <a:t>2024/12/6</a:t>
+              <a:t>2025/1/7</a:t>
             </a:fld>
             <a:endParaRPr lang="en-CN"/>
           </a:p>
@@ -2400,7 +2403,7 @@
           <a:p>
             <a:fld id="{5DD8AB15-54DA-BC48-9BAB-770E2E857439}" type="datetimeFigureOut">
               <a:rPr lang="en-CN" smtClean="0"/>
-              <a:t>2024/12/6</a:t>
+              <a:t>2025/1/7</a:t>
             </a:fld>
             <a:endParaRPr lang="en-CN"/>
           </a:p>
@@ -2689,7 +2692,7 @@
           <a:p>
             <a:fld id="{5DD8AB15-54DA-BC48-9BAB-770E2E857439}" type="datetimeFigureOut">
               <a:rPr lang="en-CN" smtClean="0"/>
-              <a:t>2024/12/6</a:t>
+              <a:t>2025/1/7</a:t>
             </a:fld>
             <a:endParaRPr lang="en-CN"/>
           </a:p>
@@ -2768,8 +2771,9 @@
     <p:bg>
       <p:bgPr>
         <a:solidFill>
-          <a:schemeClr val="bg1">
-            <a:lumMod val="85000"/>
+          <a:schemeClr val="tx1">
+            <a:lumMod val="75000"/>
+            <a:lumOff val="25000"/>
           </a:schemeClr>
         </a:solidFill>
         <a:effectLst/>
@@ -2937,7 +2941,7 @@
           <a:p>
             <a:fld id="{5DD8AB15-54DA-BC48-9BAB-770E2E857439}" type="datetimeFigureOut">
               <a:rPr lang="en-CN" smtClean="0"/>
-              <a:t>2024/12/6</a:t>
+              <a:t>2025/1/7</a:t>
             </a:fld>
             <a:endParaRPr lang="en-CN"/>
           </a:p>
@@ -3375,6 +3379,11 @@
             <a:avLst/>
           </a:prstGeom>
           <a:noFill/>
+          <a:ln>
+            <a:solidFill>
+              <a:schemeClr val="bg1"/>
+            </a:solidFill>
+          </a:ln>
         </p:spPr>
         <p:style>
           <a:lnRef idx="2">
@@ -3422,6 +3431,11 @@
             <a:avLst/>
           </a:prstGeom>
           <a:noFill/>
+          <a:ln>
+            <a:solidFill>
+              <a:schemeClr val="bg1"/>
+            </a:solidFill>
+          </a:ln>
         </p:spPr>
         <p:txBody>
           <a:bodyPr wrap="none" rtlCol="0">
@@ -3430,7 +3444,11 @@
           <a:lstStyle/>
           <a:p>
             <a:r>
-              <a:rPr lang="en-CN" dirty="0"/>
+              <a:rPr lang="en-CN" dirty="0">
+                <a:solidFill>
+                  <a:schemeClr val="bg1"/>
+                </a:solidFill>
+              </a:rPr>
               <a:t>mainFolder</a:t>
             </a:r>
           </a:p>
@@ -3457,6 +3475,11 @@
             <a:avLst/>
           </a:prstGeom>
           <a:noFill/>
+          <a:ln>
+            <a:solidFill>
+              <a:schemeClr val="bg1"/>
+            </a:solidFill>
+          </a:ln>
         </p:spPr>
         <p:style>
           <a:lnRef idx="2">
@@ -3504,6 +3527,11 @@
             <a:avLst/>
           </a:prstGeom>
           <a:noFill/>
+          <a:ln>
+            <a:solidFill>
+              <a:schemeClr val="bg1"/>
+            </a:solidFill>
+          </a:ln>
         </p:spPr>
         <p:txBody>
           <a:bodyPr wrap="none" rtlCol="0">
@@ -3512,7 +3540,11 @@
           <a:lstStyle/>
           <a:p>
             <a:r>
-              <a:rPr lang="en-CN" dirty="0"/>
+              <a:rPr lang="en-CN" dirty="0">
+                <a:solidFill>
+                  <a:schemeClr val="bg1"/>
+                </a:solidFill>
+              </a:rPr>
               <a:t>folder</a:t>
             </a:r>
           </a:p>
@@ -3539,6 +3571,11 @@
             <a:avLst/>
           </a:prstGeom>
           <a:noFill/>
+          <a:ln>
+            <a:solidFill>
+              <a:schemeClr val="bg1"/>
+            </a:solidFill>
+          </a:ln>
         </p:spPr>
         <p:style>
           <a:lnRef idx="2">
@@ -3586,6 +3623,11 @@
             <a:avLst/>
           </a:prstGeom>
           <a:noFill/>
+          <a:ln>
+            <a:solidFill>
+              <a:schemeClr val="bg1"/>
+            </a:solidFill>
+          </a:ln>
         </p:spPr>
         <p:txBody>
           <a:bodyPr wrap="none" rtlCol="0">
@@ -3594,7 +3636,11 @@
           <a:lstStyle/>
           <a:p>
             <a:r>
-              <a:rPr lang="en-CN" dirty="0"/>
+              <a:rPr lang="en-CN" dirty="0">
+                <a:solidFill>
+                  <a:schemeClr val="bg1"/>
+                </a:solidFill>
+              </a:rPr>
               <a:t>wordlist</a:t>
             </a:r>
           </a:p>
@@ -3615,14 +3661,14 @@
           <p:nvPr>
             <p:extLst>
               <p:ext uri="{D42A27DB-BD31-4B8C-83A1-F6EECF244321}">
-                <p14:modId xmlns:p14="http://schemas.microsoft.com/office/powerpoint/2010/main" val="4157034455"/>
+                <p14:modId xmlns:p14="http://schemas.microsoft.com/office/powerpoint/2010/main" val="3049939062"/>
               </p:ext>
             </p:extLst>
           </p:nvPr>
         </p:nvGraphicFramePr>
         <p:xfrm>
-          <a:off x="2656430" y="450034"/>
-          <a:ext cx="1039671" cy="274320"/>
+          <a:off x="2656429" y="450034"/>
+          <a:ext cx="3313446" cy="274320"/>
         </p:xfrm>
         <a:graphic>
           <a:graphicData uri="http://schemas.openxmlformats.org/drawingml/2006/table">
@@ -3631,10 +3677,24 @@
                 <a:tableStyleId>{5C22544A-7EE6-4342-B048-85BDC9FD1C3A}</a:tableStyleId>
               </a:tblPr>
               <a:tblGrid>
-                <a:gridCol w="1039671">
+                <a:gridCol w="1104482">
                   <a:extLst>
                     <a:ext uri="{9D8B030D-6E8A-4147-A177-3AD203B41FA5}">
                       <a16:colId xmlns:a16="http://schemas.microsoft.com/office/drawing/2014/main" val="4195830450"/>
+                    </a:ext>
+                  </a:extLst>
+                </a:gridCol>
+                <a:gridCol w="1104482">
+                  <a:extLst>
+                    <a:ext uri="{9D8B030D-6E8A-4147-A177-3AD203B41FA5}">
+                      <a16:colId xmlns:a16="http://schemas.microsoft.com/office/drawing/2014/main" val="2923059037"/>
+                    </a:ext>
+                  </a:extLst>
+                </a:gridCol>
+                <a:gridCol w="1104482">
+                  <a:extLst>
+                    <a:ext uri="{9D8B030D-6E8A-4147-A177-3AD203B41FA5}">
+                      <a16:colId xmlns:a16="http://schemas.microsoft.com/office/drawing/2014/main" val="81827440"/>
                     </a:ext>
                   </a:extLst>
                 </a:gridCol>
@@ -3648,7 +3708,7 @@
                       <a:r>
                         <a:rPr lang="en-CN" sz="1200" dirty="0">
                           <a:solidFill>
-                            <a:schemeClr val="tx1"/>
+                            <a:schemeClr val="bg1"/>
                           </a:solidFill>
                         </a:rPr>
                         <a:t>FolderName</a:t>
@@ -3658,7 +3718,7 @@
                   <a:tcPr>
                     <a:lnL w="12700" cap="flat" cmpd="sng" algn="ctr">
                       <a:solidFill>
-                        <a:schemeClr val="tx1"/>
+                        <a:schemeClr val="bg1"/>
                       </a:solidFill>
                       <a:prstDash val="solid"/>
                       <a:round/>
@@ -3667,7 +3727,7 @@
                     </a:lnL>
                     <a:lnR w="12700" cap="flat" cmpd="sng" algn="ctr">
                       <a:solidFill>
-                        <a:schemeClr val="tx1"/>
+                        <a:schemeClr val="bg1"/>
                       </a:solidFill>
                       <a:prstDash val="solid"/>
                       <a:round/>
@@ -3676,7 +3736,7 @@
                     </a:lnR>
                     <a:lnT w="12700" cap="flat" cmpd="sng" algn="ctr">
                       <a:solidFill>
-                        <a:schemeClr val="tx1"/>
+                        <a:schemeClr val="bg1"/>
                       </a:solidFill>
                       <a:prstDash val="solid"/>
                       <a:round/>
@@ -3685,7 +3745,133 @@
                     </a:lnT>
                     <a:lnB w="12700" cap="flat" cmpd="sng" algn="ctr">
                       <a:solidFill>
-                        <a:schemeClr val="tx1"/>
+                        <a:schemeClr val="bg1"/>
+                      </a:solidFill>
+                      <a:prstDash val="solid"/>
+                      <a:round/>
+                      <a:headEnd type="none" w="med" len="med"/>
+                      <a:tailEnd type="none" w="med" len="med"/>
+                    </a:lnB>
+                    <a:lnTlToBr w="12700" cmpd="sng">
+                      <a:noFill/>
+                      <a:prstDash val="solid"/>
+                    </a:lnTlToBr>
+                    <a:lnBlToTr w="12700" cmpd="sng">
+                      <a:noFill/>
+                      <a:prstDash val="solid"/>
+                    </a:lnBlToTr>
+                    <a:noFill/>
+                  </a:tcPr>
+                </a:tc>
+                <a:tc>
+                  <a:txBody>
+                    <a:bodyPr/>
+                    <a:lstStyle/>
+                    <a:p>
+                      <a:r>
+                        <a:rPr lang="en-CN" sz="1200" dirty="0">
+                          <a:solidFill>
+                            <a:schemeClr val="bg1"/>
+                          </a:solidFill>
+                        </a:rPr>
+                        <a:t>space</a:t>
+                      </a:r>
+                    </a:p>
+                  </a:txBody>
+                  <a:tcPr>
+                    <a:lnL w="12700" cap="flat" cmpd="sng" algn="ctr">
+                      <a:solidFill>
+                        <a:schemeClr val="bg1"/>
+                      </a:solidFill>
+                      <a:prstDash val="solid"/>
+                      <a:round/>
+                      <a:headEnd type="none" w="med" len="med"/>
+                      <a:tailEnd type="none" w="med" len="med"/>
+                    </a:lnL>
+                    <a:lnR w="12700" cap="flat" cmpd="sng" algn="ctr">
+                      <a:solidFill>
+                        <a:schemeClr val="bg1"/>
+                      </a:solidFill>
+                      <a:prstDash val="solid"/>
+                      <a:round/>
+                      <a:headEnd type="none" w="med" len="med"/>
+                      <a:tailEnd type="none" w="med" len="med"/>
+                    </a:lnR>
+                    <a:lnT w="12700" cap="flat" cmpd="sng" algn="ctr">
+                      <a:solidFill>
+                        <a:schemeClr val="bg1"/>
+                      </a:solidFill>
+                      <a:prstDash val="solid"/>
+                      <a:round/>
+                      <a:headEnd type="none" w="med" len="med"/>
+                      <a:tailEnd type="none" w="med" len="med"/>
+                    </a:lnT>
+                    <a:lnB w="12700" cap="flat" cmpd="sng" algn="ctr">
+                      <a:solidFill>
+                        <a:schemeClr val="bg1"/>
+                      </a:solidFill>
+                      <a:prstDash val="solid"/>
+                      <a:round/>
+                      <a:headEnd type="none" w="med" len="med"/>
+                      <a:tailEnd type="none" w="med" len="med"/>
+                    </a:lnB>
+                    <a:lnTlToBr w="12700" cmpd="sng">
+                      <a:noFill/>
+                      <a:prstDash val="solid"/>
+                    </a:lnTlToBr>
+                    <a:lnBlToTr w="12700" cmpd="sng">
+                      <a:noFill/>
+                      <a:prstDash val="solid"/>
+                    </a:lnBlToTr>
+                    <a:noFill/>
+                  </a:tcPr>
+                </a:tc>
+                <a:tc>
+                  <a:txBody>
+                    <a:bodyPr/>
+                    <a:lstStyle/>
+                    <a:p>
+                      <a:r>
+                        <a:rPr lang="en-CN" sz="1200" dirty="0">
+                          <a:solidFill>
+                            <a:schemeClr val="bg1"/>
+                          </a:solidFill>
+                        </a:rPr>
+                        <a:t>started</a:t>
+                      </a:r>
+                    </a:p>
+                  </a:txBody>
+                  <a:tcPr>
+                    <a:lnL w="12700" cap="flat" cmpd="sng" algn="ctr">
+                      <a:solidFill>
+                        <a:schemeClr val="bg1"/>
+                      </a:solidFill>
+                      <a:prstDash val="solid"/>
+                      <a:round/>
+                      <a:headEnd type="none" w="med" len="med"/>
+                      <a:tailEnd type="none" w="med" len="med"/>
+                    </a:lnL>
+                    <a:lnR w="12700" cap="flat" cmpd="sng" algn="ctr">
+                      <a:solidFill>
+                        <a:schemeClr val="bg1"/>
+                      </a:solidFill>
+                      <a:prstDash val="solid"/>
+                      <a:round/>
+                      <a:headEnd type="none" w="med" len="med"/>
+                      <a:tailEnd type="none" w="med" len="med"/>
+                    </a:lnR>
+                    <a:lnT w="12700" cap="flat" cmpd="sng" algn="ctr">
+                      <a:solidFill>
+                        <a:schemeClr val="bg1"/>
+                      </a:solidFill>
+                      <a:prstDash val="solid"/>
+                      <a:round/>
+                      <a:headEnd type="none" w="med" len="med"/>
+                      <a:tailEnd type="none" w="med" len="med"/>
+                    </a:lnT>
+                    <a:lnB w="12700" cap="flat" cmpd="sng" algn="ctr">
+                      <a:solidFill>
+                        <a:schemeClr val="bg1"/>
                       </a:solidFill>
                       <a:prstDash val="solid"/>
                       <a:round/>
@@ -3734,6 +3920,11 @@
             <a:avLst/>
           </a:prstGeom>
           <a:noFill/>
+          <a:ln>
+            <a:solidFill>
+              <a:schemeClr val="bg1"/>
+            </a:solidFill>
+          </a:ln>
         </p:spPr>
         <p:style>
           <a:lnRef idx="2">
@@ -3781,6 +3972,11 @@
             <a:avLst/>
           </a:prstGeom>
           <a:noFill/>
+          <a:ln>
+            <a:solidFill>
+              <a:schemeClr val="bg1"/>
+            </a:solidFill>
+          </a:ln>
         </p:spPr>
         <p:style>
           <a:lnRef idx="2">
@@ -3828,6 +4024,11 @@
             <a:avLst/>
           </a:prstGeom>
           <a:noFill/>
+          <a:ln>
+            <a:solidFill>
+              <a:schemeClr val="bg1"/>
+            </a:solidFill>
+          </a:ln>
         </p:spPr>
         <p:style>
           <a:lnRef idx="2">
@@ -3875,6 +4076,11 @@
             <a:avLst/>
           </a:prstGeom>
           <a:noFill/>
+          <a:ln>
+            <a:solidFill>
+              <a:schemeClr val="bg1"/>
+            </a:solidFill>
+          </a:ln>
         </p:spPr>
         <p:style>
           <a:lnRef idx="2">
@@ -3922,6 +4128,11 @@
             <a:avLst/>
           </a:prstGeom>
           <a:noFill/>
+          <a:ln>
+            <a:solidFill>
+              <a:schemeClr val="bg1"/>
+            </a:solidFill>
+          </a:ln>
         </p:spPr>
         <p:style>
           <a:lnRef idx="2">
@@ -3969,6 +4180,11 @@
             <a:avLst/>
           </a:prstGeom>
           <a:noFill/>
+          <a:ln>
+            <a:solidFill>
+              <a:schemeClr val="bg1"/>
+            </a:solidFill>
+          </a:ln>
         </p:spPr>
         <p:style>
           <a:lnRef idx="2">
@@ -4016,6 +4232,11 @@
             <a:avLst/>
           </a:prstGeom>
           <a:noFill/>
+          <a:ln>
+            <a:solidFill>
+              <a:schemeClr val="bg1"/>
+            </a:solidFill>
+          </a:ln>
         </p:spPr>
         <p:style>
           <a:lnRef idx="2">
@@ -4063,6 +4284,11 @@
             <a:avLst/>
           </a:prstGeom>
           <a:noFill/>
+          <a:ln>
+            <a:solidFill>
+              <a:schemeClr val="bg1"/>
+            </a:solidFill>
+          </a:ln>
         </p:spPr>
         <p:style>
           <a:lnRef idx="2">
@@ -4110,6 +4336,11 @@
             <a:avLst/>
           </a:prstGeom>
           <a:noFill/>
+          <a:ln>
+            <a:solidFill>
+              <a:schemeClr val="bg1"/>
+            </a:solidFill>
+          </a:ln>
         </p:spPr>
         <p:style>
           <a:lnRef idx="2">
@@ -4157,6 +4388,11 @@
             <a:avLst/>
           </a:prstGeom>
           <a:noFill/>
+          <a:ln>
+            <a:solidFill>
+              <a:schemeClr val="bg1"/>
+            </a:solidFill>
+          </a:ln>
         </p:spPr>
         <p:style>
           <a:lnRef idx="2">
@@ -4204,6 +4440,11 @@
             <a:avLst/>
           </a:prstGeom>
           <a:noFill/>
+          <a:ln>
+            <a:solidFill>
+              <a:schemeClr val="bg1"/>
+            </a:solidFill>
+          </a:ln>
         </p:spPr>
         <p:style>
           <a:lnRef idx="2">
@@ -4251,6 +4492,11 @@
             <a:avLst/>
           </a:prstGeom>
           <a:noFill/>
+          <a:ln>
+            <a:solidFill>
+              <a:schemeClr val="bg1"/>
+            </a:solidFill>
+          </a:ln>
         </p:spPr>
         <p:style>
           <a:lnRef idx="2">
@@ -4298,6 +4544,11 @@
             <a:avLst/>
           </a:prstGeom>
           <a:noFill/>
+          <a:ln>
+            <a:solidFill>
+              <a:schemeClr val="bg1"/>
+            </a:solidFill>
+          </a:ln>
         </p:spPr>
         <p:style>
           <a:lnRef idx="2">
@@ -4345,6 +4596,11 @@
             <a:avLst/>
           </a:prstGeom>
           <a:noFill/>
+          <a:ln>
+            <a:solidFill>
+              <a:schemeClr val="bg1"/>
+            </a:solidFill>
+          </a:ln>
         </p:spPr>
         <p:style>
           <a:lnRef idx="2">
@@ -4392,6 +4648,11 @@
             <a:avLst/>
           </a:prstGeom>
           <a:noFill/>
+          <a:ln>
+            <a:solidFill>
+              <a:schemeClr val="bg1"/>
+            </a:solidFill>
+          </a:ln>
         </p:spPr>
         <p:style>
           <a:lnRef idx="2">
@@ -4439,6 +4700,11 @@
             <a:avLst/>
           </a:prstGeom>
           <a:noFill/>
+          <a:ln>
+            <a:solidFill>
+              <a:schemeClr val="bg1"/>
+            </a:solidFill>
+          </a:ln>
         </p:spPr>
         <p:style>
           <a:lnRef idx="2">
@@ -4486,6 +4752,11 @@
             <a:avLst/>
           </a:prstGeom>
           <a:noFill/>
+          <a:ln>
+            <a:solidFill>
+              <a:schemeClr val="bg1"/>
+            </a:solidFill>
+          </a:ln>
         </p:spPr>
         <p:txBody>
           <a:bodyPr wrap="none" rtlCol="0">
@@ -4494,7 +4765,11 @@
           <a:lstStyle/>
           <a:p>
             <a:r>
-              <a:rPr lang="en-CN" sz="1200" dirty="0"/>
+              <a:rPr lang="en-CN" sz="1200" dirty="0">
+                <a:solidFill>
+                  <a:schemeClr val="bg1"/>
+                </a:solidFill>
+              </a:rPr>
               <a:t>.jpg</a:t>
             </a:r>
           </a:p>
@@ -4521,6 +4796,11 @@
             <a:avLst/>
           </a:prstGeom>
           <a:noFill/>
+          <a:ln>
+            <a:solidFill>
+              <a:schemeClr val="bg1"/>
+            </a:solidFill>
+          </a:ln>
         </p:spPr>
         <p:txBody>
           <a:bodyPr wrap="none" rtlCol="0">
@@ -4529,7 +4809,11 @@
           <a:lstStyle/>
           <a:p>
             <a:r>
-              <a:rPr lang="en-CN" sz="1200" dirty="0"/>
+              <a:rPr lang="en-CN" sz="1200" dirty="0">
+                <a:solidFill>
+                  <a:schemeClr val="bg1"/>
+                </a:solidFill>
+              </a:rPr>
               <a:t>.png</a:t>
             </a:r>
           </a:p>
@@ -4556,6 +4840,11 @@
             <a:avLst/>
           </a:prstGeom>
           <a:noFill/>
+          <a:ln>
+            <a:solidFill>
+              <a:schemeClr val="bg1"/>
+            </a:solidFill>
+          </a:ln>
         </p:spPr>
         <p:txBody>
           <a:bodyPr wrap="none" rtlCol="0">
@@ -4564,7 +4853,11 @@
           <a:lstStyle/>
           <a:p>
             <a:r>
-              <a:rPr lang="en-CN" sz="1200" dirty="0"/>
+              <a:rPr lang="en-CN" sz="1200" dirty="0">
+                <a:solidFill>
+                  <a:schemeClr val="bg1"/>
+                </a:solidFill>
+              </a:rPr>
               <a:t>pron.mp3</a:t>
             </a:r>
           </a:p>
@@ -4585,14 +4878,14 @@
           <p:nvPr>
             <p:extLst>
               <p:ext uri="{D42A27DB-BD31-4B8C-83A1-F6EECF244321}">
-                <p14:modId xmlns:p14="http://schemas.microsoft.com/office/powerpoint/2010/main" val="818366703"/>
+                <p14:modId xmlns:p14="http://schemas.microsoft.com/office/powerpoint/2010/main" val="1525106420"/>
               </p:ext>
             </p:extLst>
           </p:nvPr>
         </p:nvGraphicFramePr>
         <p:xfrm>
-          <a:off x="2656430" y="823686"/>
-          <a:ext cx="4152692" cy="274320"/>
+          <a:off x="2656428" y="823686"/>
+          <a:ext cx="7769832" cy="274320"/>
         </p:xfrm>
         <a:graphic>
           <a:graphicData uri="http://schemas.openxmlformats.org/drawingml/2006/table">
@@ -4601,31 +4894,59 @@
                 <a:tableStyleId>{5C22544A-7EE6-4342-B048-85BDC9FD1C3A}</a:tableStyleId>
               </a:tblPr>
               <a:tblGrid>
-                <a:gridCol w="1038173">
+                <a:gridCol w="971229">
                   <a:extLst>
                     <a:ext uri="{9D8B030D-6E8A-4147-A177-3AD203B41FA5}">
                       <a16:colId xmlns:a16="http://schemas.microsoft.com/office/drawing/2014/main" val="775975800"/>
                     </a:ext>
                   </a:extLst>
                 </a:gridCol>
-                <a:gridCol w="1038173">
+                <a:gridCol w="971229">
                   <a:extLst>
                     <a:ext uri="{9D8B030D-6E8A-4147-A177-3AD203B41FA5}">
                       <a16:colId xmlns:a16="http://schemas.microsoft.com/office/drawing/2014/main" val="2859882136"/>
                     </a:ext>
                   </a:extLst>
                 </a:gridCol>
-                <a:gridCol w="1038173">
+                <a:gridCol w="971229">
                   <a:extLst>
                     <a:ext uri="{9D8B030D-6E8A-4147-A177-3AD203B41FA5}">
                       <a16:colId xmlns:a16="http://schemas.microsoft.com/office/drawing/2014/main" val="487424312"/>
                     </a:ext>
                   </a:extLst>
                 </a:gridCol>
-                <a:gridCol w="1038173">
+                <a:gridCol w="971229">
                   <a:extLst>
                     <a:ext uri="{9D8B030D-6E8A-4147-A177-3AD203B41FA5}">
                       <a16:colId xmlns:a16="http://schemas.microsoft.com/office/drawing/2014/main" val="2536831759"/>
+                    </a:ext>
+                  </a:extLst>
+                </a:gridCol>
+                <a:gridCol w="971229">
+                  <a:extLst>
+                    <a:ext uri="{9D8B030D-6E8A-4147-A177-3AD203B41FA5}">
+                      <a16:colId xmlns:a16="http://schemas.microsoft.com/office/drawing/2014/main" val="1097238590"/>
+                    </a:ext>
+                  </a:extLst>
+                </a:gridCol>
+                <a:gridCol w="971229">
+                  <a:extLst>
+                    <a:ext uri="{9D8B030D-6E8A-4147-A177-3AD203B41FA5}">
+                      <a16:colId xmlns:a16="http://schemas.microsoft.com/office/drawing/2014/main" val="1749496956"/>
+                    </a:ext>
+                  </a:extLst>
+                </a:gridCol>
+                <a:gridCol w="971229">
+                  <a:extLst>
+                    <a:ext uri="{9D8B030D-6E8A-4147-A177-3AD203B41FA5}">
+                      <a16:colId xmlns:a16="http://schemas.microsoft.com/office/drawing/2014/main" val="1243388"/>
+                    </a:ext>
+                  </a:extLst>
+                </a:gridCol>
+                <a:gridCol w="971229">
+                  <a:extLst>
+                    <a:ext uri="{9D8B030D-6E8A-4147-A177-3AD203B41FA5}">
+                      <a16:colId xmlns:a16="http://schemas.microsoft.com/office/drawing/2014/main" val="2799296722"/>
                     </a:ext>
                   </a:extLst>
                 </a:gridCol>
@@ -4639,17 +4960,17 @@
                       <a:r>
                         <a:rPr lang="en-CN" sz="1200" dirty="0">
                           <a:solidFill>
-                            <a:schemeClr val="tx1"/>
+                            <a:schemeClr val="bg1"/>
                           </a:solidFill>
                         </a:rPr>
-                        <a:t>Name</a:t>
+                        <a:t>id</a:t>
                       </a:r>
                     </a:p>
                   </a:txBody>
                   <a:tcPr>
                     <a:lnL w="12700" cap="flat" cmpd="sng" algn="ctr">
                       <a:solidFill>
-                        <a:schemeClr val="tx1"/>
+                        <a:schemeClr val="bg1"/>
                       </a:solidFill>
                       <a:prstDash val="solid"/>
                       <a:round/>
@@ -4658,7 +4979,7 @@
                     </a:lnL>
                     <a:lnR w="12700" cap="flat" cmpd="sng" algn="ctr">
                       <a:solidFill>
-                        <a:schemeClr val="tx1"/>
+                        <a:schemeClr val="bg1"/>
                       </a:solidFill>
                       <a:prstDash val="solid"/>
                       <a:round/>
@@ -4667,7 +4988,7 @@
                     </a:lnR>
                     <a:lnT w="12700" cap="flat" cmpd="sng" algn="ctr">
                       <a:solidFill>
-                        <a:schemeClr val="tx1"/>
+                        <a:schemeClr val="bg1"/>
                       </a:solidFill>
                       <a:prstDash val="solid"/>
                       <a:round/>
@@ -4676,7 +4997,7 @@
                     </a:lnT>
                     <a:lnB w="12700" cap="flat" cmpd="sng" algn="ctr">
                       <a:solidFill>
-                        <a:schemeClr val="tx1"/>
+                        <a:schemeClr val="bg1"/>
                       </a:solidFill>
                       <a:prstDash val="solid"/>
                       <a:round/>
@@ -4694,25 +5015,22 @@
                       <a:r>
                         <a:rPr lang="en-US" sz="1200" dirty="0">
                           <a:solidFill>
-                            <a:schemeClr val="tx1"/>
+                            <a:schemeClr val="bg1"/>
                           </a:solidFill>
                         </a:rPr>
-                        <a:t>L</a:t>
+                        <a:t>name</a:t>
                       </a:r>
-                      <a:r>
-                        <a:rPr lang="en-CN" sz="1200" dirty="0">
-                          <a:solidFill>
-                            <a:schemeClr val="tx1"/>
-                          </a:solidFill>
-                        </a:rPr>
-                        <a:t>anguage</a:t>
-                      </a:r>
+                      <a:endParaRPr lang="en-CN" sz="1200" dirty="0">
+                        <a:solidFill>
+                          <a:schemeClr val="bg1"/>
+                        </a:solidFill>
+                      </a:endParaRPr>
                     </a:p>
                   </a:txBody>
                   <a:tcPr>
                     <a:lnL w="12700" cap="flat" cmpd="sng" algn="ctr">
                       <a:solidFill>
-                        <a:schemeClr val="tx1"/>
+                        <a:schemeClr val="bg1"/>
                       </a:solidFill>
                       <a:prstDash val="solid"/>
                       <a:round/>
@@ -4721,7 +5039,7 @@
                     </a:lnL>
                     <a:lnR w="12700" cap="flat" cmpd="sng" algn="ctr">
                       <a:solidFill>
-                        <a:schemeClr val="tx1"/>
+                        <a:schemeClr val="bg1"/>
                       </a:solidFill>
                       <a:prstDash val="solid"/>
                       <a:round/>
@@ -4730,7 +5048,7 @@
                     </a:lnR>
                     <a:lnT w="12700" cap="flat" cmpd="sng" algn="ctr">
                       <a:solidFill>
-                        <a:schemeClr val="tx1"/>
+                        <a:schemeClr val="bg1"/>
                       </a:solidFill>
                       <a:prstDash val="solid"/>
                       <a:round/>
@@ -4739,7 +5057,7 @@
                     </a:lnT>
                     <a:lnB w="12700" cap="flat" cmpd="sng" algn="ctr">
                       <a:solidFill>
-                        <a:schemeClr val="tx1"/>
+                        <a:schemeClr val="bg1"/>
                       </a:solidFill>
                       <a:prstDash val="solid"/>
                       <a:round/>
@@ -4757,25 +5075,22 @@
                       <a:r>
                         <a:rPr lang="en-US" sz="1200" dirty="0">
                           <a:solidFill>
-                            <a:schemeClr val="tx1"/>
+                            <a:schemeClr val="bg1"/>
                           </a:solidFill>
                         </a:rPr>
-                        <a:t>S</a:t>
+                        <a:t>Language</a:t>
                       </a:r>
-                      <a:r>
-                        <a:rPr lang="en-CN" sz="1200" dirty="0">
-                          <a:solidFill>
-                            <a:schemeClr val="tx1"/>
-                          </a:solidFill>
-                        </a:rPr>
-                        <a:t>tart</a:t>
-                      </a:r>
+                      <a:endParaRPr lang="en-CN" sz="1200" dirty="0">
+                        <a:solidFill>
+                          <a:schemeClr val="bg1"/>
+                        </a:solidFill>
+                      </a:endParaRPr>
                     </a:p>
                   </a:txBody>
                   <a:tcPr>
                     <a:lnL w="12700" cap="flat" cmpd="sng" algn="ctr">
                       <a:solidFill>
-                        <a:schemeClr val="tx1"/>
+                        <a:schemeClr val="bg1"/>
                       </a:solidFill>
                       <a:prstDash val="solid"/>
                       <a:round/>
@@ -4784,7 +5099,7 @@
                     </a:lnL>
                     <a:lnR w="12700" cap="flat" cmpd="sng" algn="ctr">
                       <a:solidFill>
-                        <a:schemeClr val="tx1"/>
+                        <a:schemeClr val="bg1"/>
                       </a:solidFill>
                       <a:prstDash val="solid"/>
                       <a:round/>
@@ -4793,7 +5108,7 @@
                     </a:lnR>
                     <a:lnT w="12700" cap="flat" cmpd="sng" algn="ctr">
                       <a:solidFill>
-                        <a:schemeClr val="tx1"/>
+                        <a:schemeClr val="bg1"/>
                       </a:solidFill>
                       <a:prstDash val="solid"/>
                       <a:round/>
@@ -4802,7 +5117,7 @@
                     </a:lnT>
                     <a:lnB w="12700" cap="flat" cmpd="sng" algn="ctr">
                       <a:solidFill>
-                        <a:schemeClr val="tx1"/>
+                        <a:schemeClr val="bg1"/>
                       </a:solidFill>
                       <a:prstDash val="solid"/>
                       <a:round/>
@@ -4820,17 +5135,17 @@
                       <a:r>
                         <a:rPr lang="en-CN" sz="1200" dirty="0">
                           <a:solidFill>
-                            <a:schemeClr val="tx1"/>
+                            <a:schemeClr val="bg1"/>
                           </a:solidFill>
                         </a:rPr>
-                        <a:t>Date</a:t>
+                        <a:t>dir</a:t>
                       </a:r>
                     </a:p>
                   </a:txBody>
                   <a:tcPr>
                     <a:lnL w="12700" cap="flat" cmpd="sng" algn="ctr">
                       <a:solidFill>
-                        <a:schemeClr val="tx1"/>
+                        <a:schemeClr val="bg1"/>
                       </a:solidFill>
                       <a:prstDash val="solid"/>
                       <a:round/>
@@ -4839,7 +5154,7 @@
                     </a:lnL>
                     <a:lnR w="12700" cap="flat" cmpd="sng" algn="ctr">
                       <a:solidFill>
-                        <a:schemeClr val="tx1"/>
+                        <a:schemeClr val="bg1"/>
                       </a:solidFill>
                       <a:prstDash val="solid"/>
                       <a:round/>
@@ -4848,7 +5163,7 @@
                     </a:lnR>
                     <a:lnT w="12700" cap="flat" cmpd="sng" algn="ctr">
                       <a:solidFill>
-                        <a:schemeClr val="tx1"/>
+                        <a:schemeClr val="bg1"/>
                       </a:solidFill>
                       <a:prstDash val="solid"/>
                       <a:round/>
@@ -4857,7 +5172,227 @@
                     </a:lnT>
                     <a:lnB w="12700" cap="flat" cmpd="sng" algn="ctr">
                       <a:solidFill>
-                        <a:schemeClr val="tx1"/>
+                        <a:schemeClr val="bg1"/>
+                      </a:solidFill>
+                      <a:prstDash val="solid"/>
+                      <a:round/>
+                      <a:headEnd type="none" w="med" len="med"/>
+                      <a:tailEnd type="none" w="med" len="med"/>
+                    </a:lnB>
+                    <a:noFill/>
+                  </a:tcPr>
+                </a:tc>
+                <a:tc>
+                  <a:txBody>
+                    <a:bodyPr/>
+                    <a:lstStyle/>
+                    <a:p>
+                      <a:r>
+                        <a:rPr lang="en-CN" sz="1200" dirty="0">
+                          <a:solidFill>
+                            <a:schemeClr val="bg1"/>
+                          </a:solidFill>
+                        </a:rPr>
+                        <a:t>passCount</a:t>
+                      </a:r>
+                    </a:p>
+                  </a:txBody>
+                  <a:tcPr>
+                    <a:lnL w="12700" cap="flat" cmpd="sng" algn="ctr">
+                      <a:solidFill>
+                        <a:schemeClr val="bg1"/>
+                      </a:solidFill>
+                      <a:prstDash val="solid"/>
+                      <a:round/>
+                      <a:headEnd type="none" w="med" len="med"/>
+                      <a:tailEnd type="none" w="med" len="med"/>
+                    </a:lnL>
+                    <a:lnR w="12700" cap="flat" cmpd="sng" algn="ctr">
+                      <a:solidFill>
+                        <a:schemeClr val="bg1"/>
+                      </a:solidFill>
+                      <a:prstDash val="solid"/>
+                      <a:round/>
+                      <a:headEnd type="none" w="med" len="med"/>
+                      <a:tailEnd type="none" w="med" len="med"/>
+                    </a:lnR>
+                    <a:lnT w="12700" cap="flat" cmpd="sng" algn="ctr">
+                      <a:solidFill>
+                        <a:schemeClr val="bg1"/>
+                      </a:solidFill>
+                      <a:prstDash val="solid"/>
+                      <a:round/>
+                      <a:headEnd type="none" w="med" len="med"/>
+                      <a:tailEnd type="none" w="med" len="med"/>
+                    </a:lnT>
+                    <a:lnB w="12700" cap="flat" cmpd="sng" algn="ctr">
+                      <a:solidFill>
+                        <a:schemeClr val="bg1"/>
+                      </a:solidFill>
+                      <a:prstDash val="solid"/>
+                      <a:round/>
+                      <a:headEnd type="none" w="med" len="med"/>
+                      <a:tailEnd type="none" w="med" len="med"/>
+                    </a:lnB>
+                    <a:noFill/>
+                  </a:tcPr>
+                </a:tc>
+                <a:tc>
+                  <a:txBody>
+                    <a:bodyPr/>
+                    <a:lstStyle/>
+                    <a:p>
+                      <a:r>
+                        <a:rPr lang="en-CN" sz="1200" dirty="0">
+                          <a:solidFill>
+                            <a:schemeClr val="bg1"/>
+                          </a:solidFill>
+                        </a:rPr>
+                        <a:t>start</a:t>
+                      </a:r>
+                    </a:p>
+                  </a:txBody>
+                  <a:tcPr>
+                    <a:lnL w="12700" cap="flat" cmpd="sng" algn="ctr">
+                      <a:solidFill>
+                        <a:schemeClr val="bg1"/>
+                      </a:solidFill>
+                      <a:prstDash val="solid"/>
+                      <a:round/>
+                      <a:headEnd type="none" w="med" len="med"/>
+                      <a:tailEnd type="none" w="med" len="med"/>
+                    </a:lnL>
+                    <a:lnR w="12700" cap="flat" cmpd="sng" algn="ctr">
+                      <a:solidFill>
+                        <a:schemeClr val="bg1"/>
+                      </a:solidFill>
+                      <a:prstDash val="solid"/>
+                      <a:round/>
+                      <a:headEnd type="none" w="med" len="med"/>
+                      <a:tailEnd type="none" w="med" len="med"/>
+                    </a:lnR>
+                    <a:lnT w="12700" cap="flat" cmpd="sng" algn="ctr">
+                      <a:solidFill>
+                        <a:schemeClr val="bg1"/>
+                      </a:solidFill>
+                      <a:prstDash val="solid"/>
+                      <a:round/>
+                      <a:headEnd type="none" w="med" len="med"/>
+                      <a:tailEnd type="none" w="med" len="med"/>
+                    </a:lnT>
+                    <a:lnB w="12700" cap="flat" cmpd="sng" algn="ctr">
+                      <a:solidFill>
+                        <a:schemeClr val="bg1"/>
+                      </a:solidFill>
+                      <a:prstDash val="solid"/>
+                      <a:round/>
+                      <a:headEnd type="none" w="med" len="med"/>
+                      <a:tailEnd type="none" w="med" len="med"/>
+                    </a:lnB>
+                    <a:noFill/>
+                  </a:tcPr>
+                </a:tc>
+                <a:tc>
+                  <a:txBody>
+                    <a:bodyPr/>
+                    <a:lstStyle/>
+                    <a:p>
+                      <a:r>
+                        <a:rPr lang="en-CN" sz="1200" dirty="0">
+                          <a:solidFill>
+                            <a:schemeClr val="bg1"/>
+                          </a:solidFill>
+                        </a:rPr>
+                        <a:t>date</a:t>
+                      </a:r>
+                    </a:p>
+                  </a:txBody>
+                  <a:tcPr>
+                    <a:lnL w="12700" cap="flat" cmpd="sng" algn="ctr">
+                      <a:solidFill>
+                        <a:schemeClr val="bg1"/>
+                      </a:solidFill>
+                      <a:prstDash val="solid"/>
+                      <a:round/>
+                      <a:headEnd type="none" w="med" len="med"/>
+                      <a:tailEnd type="none" w="med" len="med"/>
+                    </a:lnL>
+                    <a:lnR w="12700" cap="flat" cmpd="sng" algn="ctr">
+                      <a:solidFill>
+                        <a:schemeClr val="bg1"/>
+                      </a:solidFill>
+                      <a:prstDash val="solid"/>
+                      <a:round/>
+                      <a:headEnd type="none" w="med" len="med"/>
+                      <a:tailEnd type="none" w="med" len="med"/>
+                    </a:lnR>
+                    <a:lnT w="12700" cap="flat" cmpd="sng" algn="ctr">
+                      <a:solidFill>
+                        <a:schemeClr val="bg1"/>
+                      </a:solidFill>
+                      <a:prstDash val="solid"/>
+                      <a:round/>
+                      <a:headEnd type="none" w="med" len="med"/>
+                      <a:tailEnd type="none" w="med" len="med"/>
+                    </a:lnT>
+                    <a:lnB w="12700" cap="flat" cmpd="sng" algn="ctr">
+                      <a:solidFill>
+                        <a:schemeClr val="bg1"/>
+                      </a:solidFill>
+                      <a:prstDash val="solid"/>
+                      <a:round/>
+                      <a:headEnd type="none" w="med" len="med"/>
+                      <a:tailEnd type="none" w="med" len="med"/>
+                    </a:lnB>
+                    <a:noFill/>
+                  </a:tcPr>
+                </a:tc>
+                <a:tc>
+                  <a:txBody>
+                    <a:bodyPr/>
+                    <a:lstStyle/>
+                    <a:p>
+                      <a:r>
+                        <a:rPr lang="en-CN" sz="1200" dirty="0">
+                          <a:solidFill>
+                            <a:schemeClr val="bg1"/>
+                          </a:solidFill>
+                        </a:rPr>
+                        <a:t>wordCount</a:t>
+                      </a:r>
+                    </a:p>
+                  </a:txBody>
+                  <a:tcPr>
+                    <a:lnL w="12700" cap="flat" cmpd="sng" algn="ctr">
+                      <a:solidFill>
+                        <a:schemeClr val="bg1"/>
+                      </a:solidFill>
+                      <a:prstDash val="solid"/>
+                      <a:round/>
+                      <a:headEnd type="none" w="med" len="med"/>
+                      <a:tailEnd type="none" w="med" len="med"/>
+                    </a:lnL>
+                    <a:lnR w="12700" cap="flat" cmpd="sng" algn="ctr">
+                      <a:solidFill>
+                        <a:schemeClr val="bg1"/>
+                      </a:solidFill>
+                      <a:prstDash val="solid"/>
+                      <a:round/>
+                      <a:headEnd type="none" w="med" len="med"/>
+                      <a:tailEnd type="none" w="med" len="med"/>
+                    </a:lnR>
+                    <a:lnT w="12700" cap="flat" cmpd="sng" algn="ctr">
+                      <a:solidFill>
+                        <a:schemeClr val="bg1"/>
+                      </a:solidFill>
+                      <a:prstDash val="solid"/>
+                      <a:round/>
+                      <a:headEnd type="none" w="med" len="med"/>
+                      <a:tailEnd type="none" w="med" len="med"/>
+                    </a:lnT>
+                    <a:lnB w="12700" cap="flat" cmpd="sng" algn="ctr">
+                      <a:solidFill>
+                        <a:schemeClr val="bg1"/>
                       </a:solidFill>
                       <a:prstDash val="solid"/>
                       <a:round/>
@@ -4892,14 +5427,14 @@
           <p:nvPr>
             <p:extLst>
               <p:ext uri="{D42A27DB-BD31-4B8C-83A1-F6EECF244321}">
-                <p14:modId xmlns:p14="http://schemas.microsoft.com/office/powerpoint/2010/main" val="166359693"/>
+                <p14:modId xmlns:p14="http://schemas.microsoft.com/office/powerpoint/2010/main" val="2961027650"/>
               </p:ext>
             </p:extLst>
           </p:nvPr>
         </p:nvGraphicFramePr>
         <p:xfrm>
-          <a:off x="2656427" y="1197468"/>
-          <a:ext cx="6071940" cy="274320"/>
+          <a:off x="2656424" y="1197468"/>
+          <a:ext cx="8330126" cy="274320"/>
         </p:xfrm>
         <a:graphic>
           <a:graphicData uri="http://schemas.openxmlformats.org/drawingml/2006/table">
@@ -4908,45 +5443,52 @@
                 <a:tableStyleId>{5C22544A-7EE6-4342-B048-85BDC9FD1C3A}</a:tableStyleId>
               </a:tblPr>
               <a:tblGrid>
-                <a:gridCol w="1011990">
+                <a:gridCol w="1190018">
                   <a:extLst>
                     <a:ext uri="{9D8B030D-6E8A-4147-A177-3AD203B41FA5}">
                       <a16:colId xmlns:a16="http://schemas.microsoft.com/office/drawing/2014/main" val="775975800"/>
                     </a:ext>
                   </a:extLst>
                 </a:gridCol>
-                <a:gridCol w="1011990">
+                <a:gridCol w="1190018">
                   <a:extLst>
                     <a:ext uri="{9D8B030D-6E8A-4147-A177-3AD203B41FA5}">
                       <a16:colId xmlns:a16="http://schemas.microsoft.com/office/drawing/2014/main" val="2859882136"/>
                     </a:ext>
                   </a:extLst>
                 </a:gridCol>
-                <a:gridCol w="1011990">
+                <a:gridCol w="1190018">
                   <a:extLst>
                     <a:ext uri="{9D8B030D-6E8A-4147-A177-3AD203B41FA5}">
                       <a16:colId xmlns:a16="http://schemas.microsoft.com/office/drawing/2014/main" val="2480661890"/>
                     </a:ext>
                   </a:extLst>
                 </a:gridCol>
-                <a:gridCol w="1011990">
+                <a:gridCol w="1190018">
                   <a:extLst>
                     <a:ext uri="{9D8B030D-6E8A-4147-A177-3AD203B41FA5}">
                       <a16:colId xmlns:a16="http://schemas.microsoft.com/office/drawing/2014/main" val="2536831759"/>
                     </a:ext>
                   </a:extLst>
                 </a:gridCol>
-                <a:gridCol w="1011990">
+                <a:gridCol w="1190018">
                   <a:extLst>
                     <a:ext uri="{9D8B030D-6E8A-4147-A177-3AD203B41FA5}">
                       <a16:colId xmlns:a16="http://schemas.microsoft.com/office/drawing/2014/main" val="2450884560"/>
                     </a:ext>
                   </a:extLst>
                 </a:gridCol>
-                <a:gridCol w="1011990">
+                <a:gridCol w="1190018">
                   <a:extLst>
                     <a:ext uri="{9D8B030D-6E8A-4147-A177-3AD203B41FA5}">
                       <a16:colId xmlns:a16="http://schemas.microsoft.com/office/drawing/2014/main" val="37746477"/>
+                    </a:ext>
+                  </a:extLst>
+                </a:gridCol>
+                <a:gridCol w="1190018">
+                  <a:extLst>
+                    <a:ext uri="{9D8B030D-6E8A-4147-A177-3AD203B41FA5}">
+                      <a16:colId xmlns:a16="http://schemas.microsoft.com/office/drawing/2014/main" val="3941051362"/>
                     </a:ext>
                   </a:extLst>
                 </a:gridCol>
@@ -4960,7 +5502,7 @@
                       <a:r>
                         <a:rPr lang="en-CN" sz="1200" dirty="0">
                           <a:solidFill>
-                            <a:schemeClr val="tx1"/>
+                            <a:schemeClr val="bg1"/>
                           </a:solidFill>
                         </a:rPr>
                         <a:t>Spell</a:t>
@@ -4970,7 +5512,7 @@
                   <a:tcPr>
                     <a:lnL w="12700" cap="flat" cmpd="sng" algn="ctr">
                       <a:solidFill>
-                        <a:schemeClr val="tx1"/>
+                        <a:schemeClr val="bg1"/>
                       </a:solidFill>
                       <a:prstDash val="solid"/>
                       <a:round/>
@@ -4979,7 +5521,7 @@
                     </a:lnL>
                     <a:lnR w="12700" cap="flat" cmpd="sng" algn="ctr">
                       <a:solidFill>
-                        <a:schemeClr val="tx1"/>
+                        <a:schemeClr val="bg1"/>
                       </a:solidFill>
                       <a:prstDash val="solid"/>
                       <a:round/>
@@ -4988,7 +5530,7 @@
                     </a:lnR>
                     <a:lnT w="12700" cap="flat" cmpd="sng" algn="ctr">
                       <a:solidFill>
-                        <a:schemeClr val="tx1"/>
+                        <a:schemeClr val="bg1"/>
                       </a:solidFill>
                       <a:prstDash val="solid"/>
                       <a:round/>
@@ -4997,7 +5539,7 @@
                     </a:lnT>
                     <a:lnB w="12700" cap="flat" cmpd="sng" algn="ctr">
                       <a:solidFill>
-                        <a:schemeClr val="tx1"/>
+                        <a:schemeClr val="bg1"/>
                       </a:solidFill>
                       <a:prstDash val="solid"/>
                       <a:round/>
@@ -5015,17 +5557,17 @@
                       <a:r>
                         <a:rPr lang="en-CN" sz="1200" dirty="0">
                           <a:solidFill>
-                            <a:schemeClr val="tx1"/>
+                            <a:schemeClr val="bg1"/>
                           </a:solidFill>
                         </a:rPr>
-                        <a:t>passCount</a:t>
+                        <a:t>type</a:t>
                       </a:r>
                     </a:p>
                   </a:txBody>
                   <a:tcPr>
                     <a:lnL w="12700" cap="flat" cmpd="sng" algn="ctr">
                       <a:solidFill>
-                        <a:schemeClr val="tx1"/>
+                        <a:schemeClr val="bg1"/>
                       </a:solidFill>
                       <a:prstDash val="solid"/>
                       <a:round/>
@@ -5034,7 +5576,7 @@
                     </a:lnL>
                     <a:lnR w="12700" cap="flat" cmpd="sng" algn="ctr">
                       <a:solidFill>
-                        <a:schemeClr val="tx1"/>
+                        <a:schemeClr val="bg1"/>
                       </a:solidFill>
                       <a:prstDash val="solid"/>
                       <a:round/>
@@ -5043,7 +5585,7 @@
                     </a:lnR>
                     <a:lnT w="12700" cap="flat" cmpd="sng" algn="ctr">
                       <a:solidFill>
-                        <a:schemeClr val="tx1"/>
+                        <a:schemeClr val="bg1"/>
                       </a:solidFill>
                       <a:prstDash val="solid"/>
                       <a:round/>
@@ -5052,7 +5594,70 @@
                     </a:lnT>
                     <a:lnB w="12700" cap="flat" cmpd="sng" algn="ctr">
                       <a:solidFill>
-                        <a:schemeClr val="tx1"/>
+                        <a:schemeClr val="bg1"/>
+                      </a:solidFill>
+                      <a:prstDash val="solid"/>
+                      <a:round/>
+                      <a:headEnd type="none" w="med" len="med"/>
+                      <a:tailEnd type="none" w="med" len="med"/>
+                    </a:lnB>
+                    <a:noFill/>
+                  </a:tcPr>
+                </a:tc>
+                <a:tc>
+                  <a:txBody>
+                    <a:bodyPr/>
+                    <a:lstStyle/>
+                    <a:p>
+                      <a:r>
+                        <a:rPr lang="en-US" sz="1200" dirty="0">
+                          <a:solidFill>
+                            <a:schemeClr val="bg1"/>
+                          </a:solidFill>
+                        </a:rPr>
+                        <a:t>M</a:t>
+                      </a:r>
+                      <a:r>
+                        <a:rPr lang="en-CN" sz="1200" dirty="0">
+                          <a:solidFill>
+                            <a:schemeClr val="bg1"/>
+                          </a:solidFill>
+                        </a:rPr>
+                        <a:t>eaning</a:t>
+                      </a:r>
+                    </a:p>
+                  </a:txBody>
+                  <a:tcPr>
+                    <a:lnL w="12700" cap="flat" cmpd="sng" algn="ctr">
+                      <a:solidFill>
+                        <a:schemeClr val="bg1"/>
+                      </a:solidFill>
+                      <a:prstDash val="solid"/>
+                      <a:round/>
+                      <a:headEnd type="none" w="med" len="med"/>
+                      <a:tailEnd type="none" w="med" len="med"/>
+                    </a:lnL>
+                    <a:lnR w="12700" cap="flat" cmpd="sng" algn="ctr">
+                      <a:solidFill>
+                        <a:schemeClr val="bg1"/>
+                      </a:solidFill>
+                      <a:prstDash val="solid"/>
+                      <a:round/>
+                      <a:headEnd type="none" w="med" len="med"/>
+                      <a:tailEnd type="none" w="med" len="med"/>
+                    </a:lnR>
+                    <a:lnT w="12700" cap="flat" cmpd="sng" algn="ctr">
+                      <a:solidFill>
+                        <a:schemeClr val="bg1"/>
+                      </a:solidFill>
+                      <a:prstDash val="solid"/>
+                      <a:round/>
+                      <a:headEnd type="none" w="med" len="med"/>
+                      <a:tailEnd type="none" w="med" len="med"/>
+                    </a:lnT>
+                    <a:lnB w="12700" cap="flat" cmpd="sng" algn="ctr">
+                      <a:solidFill>
+                        <a:schemeClr val="bg1"/>
                       </a:solidFill>
                       <a:prstDash val="solid"/>
                       <a:round/>
@@ -5070,17 +5675,17 @@
                       <a:r>
                         <a:rPr lang="en-CN" sz="1200" dirty="0">
                           <a:solidFill>
-                            <a:schemeClr val="tx1"/>
+                            <a:schemeClr val="bg1"/>
                           </a:solidFill>
                         </a:rPr>
-                        <a:t>ImageNo</a:t>
+                        <a:t>meanID</a:t>
                       </a:r>
                     </a:p>
                   </a:txBody>
                   <a:tcPr>
                     <a:lnL w="12700" cap="flat" cmpd="sng" algn="ctr">
                       <a:solidFill>
-                        <a:schemeClr val="tx1"/>
+                        <a:schemeClr val="bg1"/>
                       </a:solidFill>
                       <a:prstDash val="solid"/>
                       <a:round/>
@@ -5089,7 +5694,7 @@
                     </a:lnL>
                     <a:lnR w="12700" cap="flat" cmpd="sng" algn="ctr">
                       <a:solidFill>
-                        <a:schemeClr val="tx1"/>
+                        <a:schemeClr val="bg1"/>
                       </a:solidFill>
                       <a:prstDash val="solid"/>
                       <a:round/>
@@ -5098,7 +5703,7 @@
                     </a:lnR>
                     <a:lnT w="12700" cap="flat" cmpd="sng" algn="ctr">
                       <a:solidFill>
-                        <a:schemeClr val="tx1"/>
+                        <a:schemeClr val="bg1"/>
                       </a:solidFill>
                       <a:prstDash val="solid"/>
                       <a:round/>
@@ -5107,75 +5712,7 @@
                     </a:lnT>
                     <a:lnB w="12700" cap="flat" cmpd="sng" algn="ctr">
                       <a:solidFill>
-                        <a:schemeClr val="tx1"/>
-                      </a:solidFill>
-                      <a:prstDash val="solid"/>
-                      <a:round/>
-                      <a:headEnd type="none" w="med" len="med"/>
-                      <a:tailEnd type="none" w="med" len="med"/>
-                    </a:lnB>
-                    <a:solidFill>
-                      <a:schemeClr val="accent2">
-                        <a:lumMod val="60000"/>
-                        <a:lumOff val="40000"/>
-                      </a:schemeClr>
-                    </a:solidFill>
-                  </a:tcPr>
-                </a:tc>
-                <a:tc>
-                  <a:txBody>
-                    <a:bodyPr/>
-                    <a:lstStyle/>
-                    <a:p>
-                      <a:r>
-                        <a:rPr lang="en-US" sz="1200" dirty="0">
-                          <a:solidFill>
-                            <a:schemeClr val="tx1"/>
-                          </a:solidFill>
-                        </a:rPr>
-                        <a:t>T</a:t>
-                      </a:r>
-                      <a:r>
-                        <a:rPr lang="en-CN" sz="1200" dirty="0">
-                          <a:solidFill>
-                            <a:schemeClr val="tx1"/>
-                          </a:solidFill>
-                        </a:rPr>
-                        <a:t>ype</a:t>
-                      </a:r>
-                    </a:p>
-                  </a:txBody>
-                  <a:tcPr>
-                    <a:lnL w="12700" cap="flat" cmpd="sng" algn="ctr">
-                      <a:solidFill>
-                        <a:schemeClr val="tx1"/>
-                      </a:solidFill>
-                      <a:prstDash val="solid"/>
-                      <a:round/>
-                      <a:headEnd type="none" w="med" len="med"/>
-                      <a:tailEnd type="none" w="med" len="med"/>
-                    </a:lnL>
-                    <a:lnR w="12700" cap="flat" cmpd="sng" algn="ctr">
-                      <a:solidFill>
-                        <a:schemeClr val="tx1"/>
-                      </a:solidFill>
-                      <a:prstDash val="solid"/>
-                      <a:round/>
-                      <a:headEnd type="none" w="med" len="med"/>
-                      <a:tailEnd type="none" w="med" len="med"/>
-                    </a:lnR>
-                    <a:lnT w="12700" cap="flat" cmpd="sng" algn="ctr">
-                      <a:solidFill>
-                        <a:schemeClr val="tx1"/>
-                      </a:solidFill>
-                      <a:prstDash val="solid"/>
-                      <a:round/>
-                      <a:headEnd type="none" w="med" len="med"/>
-                      <a:tailEnd type="none" w="med" len="med"/>
-                    </a:lnT>
-                    <a:lnB w="12700" cap="flat" cmpd="sng" algn="ctr">
-                      <a:solidFill>
-                        <a:schemeClr val="tx1"/>
+                        <a:schemeClr val="bg1"/>
                       </a:solidFill>
                       <a:prstDash val="solid"/>
                       <a:round/>
@@ -5193,17 +5730,17 @@
                       <a:r>
                         <a:rPr lang="en-CN" sz="1200" dirty="0">
                           <a:solidFill>
-                            <a:schemeClr val="tx1"/>
+                            <a:schemeClr val="bg1"/>
                           </a:solidFill>
                         </a:rPr>
-                        <a:t>TypeNo</a:t>
+                        <a:t>passCount</a:t>
                       </a:r>
                     </a:p>
                   </a:txBody>
                   <a:tcPr>
                     <a:lnL w="12700" cap="flat" cmpd="sng" algn="ctr">
                       <a:solidFill>
-                        <a:schemeClr val="tx1"/>
+                        <a:schemeClr val="bg1"/>
                       </a:solidFill>
                       <a:prstDash val="solid"/>
                       <a:round/>
@@ -5212,7 +5749,7 @@
                     </a:lnL>
                     <a:lnR w="12700" cap="flat" cmpd="sng" algn="ctr">
                       <a:solidFill>
-                        <a:schemeClr val="tx1"/>
+                        <a:schemeClr val="bg1"/>
                       </a:solidFill>
                       <a:prstDash val="solid"/>
                       <a:round/>
@@ -5221,7 +5758,7 @@
                     </a:lnR>
                     <a:lnT w="12700" cap="flat" cmpd="sng" algn="ctr">
                       <a:solidFill>
-                        <a:schemeClr val="tx1"/>
+                        <a:schemeClr val="bg1"/>
                       </a:solidFill>
                       <a:prstDash val="solid"/>
                       <a:round/>
@@ -5230,7 +5767,7 @@
                     </a:lnT>
                     <a:lnB w="12700" cap="flat" cmpd="sng" algn="ctr">
                       <a:solidFill>
-                        <a:schemeClr val="tx1"/>
+                        <a:schemeClr val="bg1"/>
                       </a:solidFill>
                       <a:prstDash val="solid"/>
                       <a:round/>
@@ -5248,17 +5785,17 @@
                       <a:r>
                         <a:rPr lang="en-CN" sz="1200" dirty="0">
                           <a:solidFill>
-                            <a:schemeClr val="tx1"/>
+                            <a:schemeClr val="bg1"/>
                           </a:solidFill>
                         </a:rPr>
-                        <a:t>Tag</a:t>
+                        <a:t>imageNumber</a:t>
                       </a:r>
                     </a:p>
                   </a:txBody>
                   <a:tcPr>
                     <a:lnL w="12700" cap="flat" cmpd="sng" algn="ctr">
                       <a:solidFill>
-                        <a:schemeClr val="tx1"/>
+                        <a:schemeClr val="bg1"/>
                       </a:solidFill>
                       <a:prstDash val="solid"/>
                       <a:round/>
@@ -5267,7 +5804,7 @@
                     </a:lnL>
                     <a:lnR w="12700" cap="flat" cmpd="sng" algn="ctr">
                       <a:solidFill>
-                        <a:schemeClr val="tx1"/>
+                        <a:schemeClr val="bg1"/>
                       </a:solidFill>
                       <a:prstDash val="solid"/>
                       <a:round/>
@@ -5276,7 +5813,7 @@
                     </a:lnR>
                     <a:lnT w="12700" cap="flat" cmpd="sng" algn="ctr">
                       <a:solidFill>
-                        <a:schemeClr val="tx1"/>
+                        <a:schemeClr val="bg1"/>
                       </a:solidFill>
                       <a:prstDash val="solid"/>
                       <a:round/>
@@ -5285,7 +5822,62 @@
                     </a:lnT>
                     <a:lnB w="12700" cap="flat" cmpd="sng" algn="ctr">
                       <a:solidFill>
-                        <a:schemeClr val="tx1"/>
+                        <a:schemeClr val="bg1"/>
+                      </a:solidFill>
+                      <a:prstDash val="solid"/>
+                      <a:round/>
+                      <a:headEnd type="none" w="med" len="med"/>
+                      <a:tailEnd type="none" w="med" len="med"/>
+                    </a:lnB>
+                    <a:noFill/>
+                  </a:tcPr>
+                </a:tc>
+                <a:tc>
+                  <a:txBody>
+                    <a:bodyPr/>
+                    <a:lstStyle/>
+                    <a:p>
+                      <a:r>
+                        <a:rPr lang="en-CN" sz="1200" dirty="0">
+                          <a:solidFill>
+                            <a:schemeClr val="bg1"/>
+                          </a:solidFill>
+                        </a:rPr>
+                        <a:t>tags</a:t>
+                      </a:r>
+                    </a:p>
+                  </a:txBody>
+                  <a:tcPr>
+                    <a:lnL w="12700" cap="flat" cmpd="sng" algn="ctr">
+                      <a:solidFill>
+                        <a:schemeClr val="bg1"/>
+                      </a:solidFill>
+                      <a:prstDash val="solid"/>
+                      <a:round/>
+                      <a:headEnd type="none" w="med" len="med"/>
+                      <a:tailEnd type="none" w="med" len="med"/>
+                    </a:lnL>
+                    <a:lnR w="12700" cap="flat" cmpd="sng" algn="ctr">
+                      <a:solidFill>
+                        <a:schemeClr val="bg1"/>
+                      </a:solidFill>
+                      <a:prstDash val="solid"/>
+                      <a:round/>
+                      <a:headEnd type="none" w="med" len="med"/>
+                      <a:tailEnd type="none" w="med" len="med"/>
+                    </a:lnR>
+                    <a:lnT w="12700" cap="flat" cmpd="sng" algn="ctr">
+                      <a:solidFill>
+                        <a:schemeClr val="bg1"/>
+                      </a:solidFill>
+                      <a:prstDash val="solid"/>
+                      <a:round/>
+                      <a:headEnd type="none" w="med" len="med"/>
+                      <a:tailEnd type="none" w="med" len="med"/>
+                    </a:lnT>
+                    <a:lnB w="12700" cap="flat" cmpd="sng" algn="ctr">
+                      <a:solidFill>
+                        <a:schemeClr val="bg1"/>
                       </a:solidFill>
                       <a:prstDash val="solid"/>
                       <a:round/>
@@ -5335,931 +5927,12 @@
           <a:chExt cx="0" cy="0"/>
         </a:xfrm>
       </p:grpSpPr>
-      <p:graphicFrame>
-        <p:nvGraphicFramePr>
-          <p:cNvPr id="4" name="Table 3">
-            <a:extLst>
-              <a:ext uri="{FF2B5EF4-FFF2-40B4-BE49-F238E27FC236}">
-                <a16:creationId xmlns:a16="http://schemas.microsoft.com/office/drawing/2014/main" id="{88416B91-C3E9-1A33-B23C-5E02BFB9193C}"/>
-              </a:ext>
-            </a:extLst>
-          </p:cNvPr>
-          <p:cNvGraphicFramePr>
-            <a:graphicFrameLocks noGrp="1"/>
-          </p:cNvGraphicFramePr>
-          <p:nvPr>
-            <p:extLst>
-              <p:ext uri="{D42A27DB-BD31-4B8C-83A1-F6EECF244321}">
-                <p14:modId xmlns:p14="http://schemas.microsoft.com/office/powerpoint/2010/main" val="1918267750"/>
-              </p:ext>
-            </p:extLst>
-          </p:nvPr>
-        </p:nvGraphicFramePr>
-        <p:xfrm>
-          <a:off x="2681143" y="993731"/>
-          <a:ext cx="1039671" cy="274320"/>
-        </p:xfrm>
-        <a:graphic>
-          <a:graphicData uri="http://schemas.openxmlformats.org/drawingml/2006/table">
-            <a:tbl>
-              <a:tblPr firstRow="1" bandRow="1">
-                <a:tableStyleId>{5C22544A-7EE6-4342-B048-85BDC9FD1C3A}</a:tableStyleId>
-              </a:tblPr>
-              <a:tblGrid>
-                <a:gridCol w="1039671">
-                  <a:extLst>
-                    <a:ext uri="{9D8B030D-6E8A-4147-A177-3AD203B41FA5}">
-                      <a16:colId xmlns:a16="http://schemas.microsoft.com/office/drawing/2014/main" val="4195830450"/>
-                    </a:ext>
-                  </a:extLst>
-                </a:gridCol>
-              </a:tblGrid>
-              <a:tr h="246972">
-                <a:tc>
-                  <a:txBody>
-                    <a:bodyPr/>
-                    <a:lstStyle/>
-                    <a:p>
-                      <a:r>
-                        <a:rPr lang="en-CN" sz="1200" dirty="0">
-                          <a:solidFill>
-                            <a:schemeClr val="tx1"/>
-                          </a:solidFill>
-                        </a:rPr>
-                        <a:t>FolderName</a:t>
-                      </a:r>
-                    </a:p>
-                  </a:txBody>
-                  <a:tcPr>
-                    <a:lnL w="12700" cap="flat" cmpd="sng" algn="ctr">
-                      <a:solidFill>
-                        <a:schemeClr val="tx1"/>
-                      </a:solidFill>
-                      <a:prstDash val="solid"/>
-                      <a:round/>
-                      <a:headEnd type="none" w="med" len="med"/>
-                      <a:tailEnd type="none" w="med" len="med"/>
-                    </a:lnL>
-                    <a:lnR w="12700" cap="flat" cmpd="sng" algn="ctr">
-                      <a:solidFill>
-                        <a:schemeClr val="tx1"/>
-                      </a:solidFill>
-                      <a:prstDash val="solid"/>
-                      <a:round/>
-                      <a:headEnd type="none" w="med" len="med"/>
-                      <a:tailEnd type="none" w="med" len="med"/>
-                    </a:lnR>
-                    <a:lnT w="12700" cap="flat" cmpd="sng" algn="ctr">
-                      <a:solidFill>
-                        <a:schemeClr val="tx1"/>
-                      </a:solidFill>
-                      <a:prstDash val="solid"/>
-                      <a:round/>
-                      <a:headEnd type="none" w="med" len="med"/>
-                      <a:tailEnd type="none" w="med" len="med"/>
-                    </a:lnT>
-                    <a:lnB w="12700" cap="flat" cmpd="sng" algn="ctr">
-                      <a:solidFill>
-                        <a:schemeClr val="tx1"/>
-                      </a:solidFill>
-                      <a:prstDash val="solid"/>
-                      <a:round/>
-                      <a:headEnd type="none" w="med" len="med"/>
-                      <a:tailEnd type="none" w="med" len="med"/>
-                    </a:lnB>
-                    <a:lnTlToBr w="12700" cmpd="sng">
-                      <a:noFill/>
-                      <a:prstDash val="solid"/>
-                    </a:lnTlToBr>
-                    <a:lnBlToTr w="12700" cmpd="sng">
-                      <a:noFill/>
-                      <a:prstDash val="solid"/>
-                    </a:lnBlToTr>
-                    <a:noFill/>
-                  </a:tcPr>
-                </a:tc>
-                <a:extLst>
-                  <a:ext uri="{0D108BD9-81ED-4DB2-BD59-A6C34878D82A}">
-                    <a16:rowId xmlns:a16="http://schemas.microsoft.com/office/drawing/2014/main" val="3079394240"/>
-                  </a:ext>
-                </a:extLst>
-              </a:tr>
-            </a:tbl>
-          </a:graphicData>
-        </a:graphic>
-      </p:graphicFrame>
-      <p:graphicFrame>
-        <p:nvGraphicFramePr>
-          <p:cNvPr id="7" name="Table 6">
-            <a:extLst>
-              <a:ext uri="{FF2B5EF4-FFF2-40B4-BE49-F238E27FC236}">
-                <a16:creationId xmlns:a16="http://schemas.microsoft.com/office/drawing/2014/main" id="{F55E9BE7-B268-A2FF-5CEE-5C6AE9E20570}"/>
-              </a:ext>
-            </a:extLst>
-          </p:cNvPr>
-          <p:cNvGraphicFramePr>
-            <a:graphicFrameLocks noGrp="1"/>
-          </p:cNvGraphicFramePr>
-          <p:nvPr>
-            <p:extLst>
-              <p:ext uri="{D42A27DB-BD31-4B8C-83A1-F6EECF244321}">
-                <p14:modId xmlns:p14="http://schemas.microsoft.com/office/powerpoint/2010/main" val="1251801835"/>
-              </p:ext>
-            </p:extLst>
-          </p:nvPr>
-        </p:nvGraphicFramePr>
-        <p:xfrm>
-          <a:off x="2681142" y="2331210"/>
-          <a:ext cx="4769980" cy="274320"/>
-        </p:xfrm>
-        <a:graphic>
-          <a:graphicData uri="http://schemas.openxmlformats.org/drawingml/2006/table">
-            <a:tbl>
-              <a:tblPr firstRow="1" bandRow="1">
-                <a:tableStyleId>{5C22544A-7EE6-4342-B048-85BDC9FD1C3A}</a:tableStyleId>
-              </a:tblPr>
-              <a:tblGrid>
-                <a:gridCol w="953996">
-                  <a:extLst>
-                    <a:ext uri="{9D8B030D-6E8A-4147-A177-3AD203B41FA5}">
-                      <a16:colId xmlns:a16="http://schemas.microsoft.com/office/drawing/2014/main" val="775975800"/>
-                    </a:ext>
-                  </a:extLst>
-                </a:gridCol>
-                <a:gridCol w="953996">
-                  <a:extLst>
-                    <a:ext uri="{9D8B030D-6E8A-4147-A177-3AD203B41FA5}">
-                      <a16:colId xmlns:a16="http://schemas.microsoft.com/office/drawing/2014/main" val="2859882136"/>
-                    </a:ext>
-                  </a:extLst>
-                </a:gridCol>
-                <a:gridCol w="953996">
-                  <a:extLst>
-                    <a:ext uri="{9D8B030D-6E8A-4147-A177-3AD203B41FA5}">
-                      <a16:colId xmlns:a16="http://schemas.microsoft.com/office/drawing/2014/main" val="487424312"/>
-                    </a:ext>
-                  </a:extLst>
-                </a:gridCol>
-                <a:gridCol w="953996">
-                  <a:extLst>
-                    <a:ext uri="{9D8B030D-6E8A-4147-A177-3AD203B41FA5}">
-                      <a16:colId xmlns:a16="http://schemas.microsoft.com/office/drawing/2014/main" val="2536831759"/>
-                    </a:ext>
-                  </a:extLst>
-                </a:gridCol>
-                <a:gridCol w="953996">
-                  <a:extLst>
-                    <a:ext uri="{9D8B030D-6E8A-4147-A177-3AD203B41FA5}">
-                      <a16:colId xmlns:a16="http://schemas.microsoft.com/office/drawing/2014/main" val="4138334116"/>
-                    </a:ext>
-                  </a:extLst>
-                </a:gridCol>
-              </a:tblGrid>
-              <a:tr h="0">
-                <a:tc>
-                  <a:txBody>
-                    <a:bodyPr/>
-                    <a:lstStyle/>
-                    <a:p>
-                      <a:r>
-                        <a:rPr lang="en-CN" sz="1200" dirty="0">
-                          <a:solidFill>
-                            <a:schemeClr val="tx1"/>
-                          </a:solidFill>
-                        </a:rPr>
-                        <a:t>Name</a:t>
-                      </a:r>
-                    </a:p>
-                  </a:txBody>
-                  <a:tcPr>
-                    <a:lnL w="12700" cap="flat" cmpd="sng" algn="ctr">
-                      <a:solidFill>
-                        <a:schemeClr val="tx1"/>
-                      </a:solidFill>
-                      <a:prstDash val="solid"/>
-                      <a:round/>
-                      <a:headEnd type="none" w="med" len="med"/>
-                      <a:tailEnd type="none" w="med" len="med"/>
-                    </a:lnL>
-                    <a:lnR w="12700" cap="flat" cmpd="sng" algn="ctr">
-                      <a:solidFill>
-                        <a:schemeClr val="tx1"/>
-                      </a:solidFill>
-                      <a:prstDash val="solid"/>
-                      <a:round/>
-                      <a:headEnd type="none" w="med" len="med"/>
-                      <a:tailEnd type="none" w="med" len="med"/>
-                    </a:lnR>
-                    <a:lnT w="12700" cap="flat" cmpd="sng" algn="ctr">
-                      <a:solidFill>
-                        <a:schemeClr val="tx1"/>
-                      </a:solidFill>
-                      <a:prstDash val="solid"/>
-                      <a:round/>
-                      <a:headEnd type="none" w="med" len="med"/>
-                      <a:tailEnd type="none" w="med" len="med"/>
-                    </a:lnT>
-                    <a:lnB w="12700" cap="flat" cmpd="sng" algn="ctr">
-                      <a:solidFill>
-                        <a:schemeClr val="tx1"/>
-                      </a:solidFill>
-                      <a:prstDash val="solid"/>
-                      <a:round/>
-                      <a:headEnd type="none" w="med" len="med"/>
-                      <a:tailEnd type="none" w="med" len="med"/>
-                    </a:lnB>
-                    <a:solidFill>
-                      <a:schemeClr val="accent2"/>
-                    </a:solidFill>
-                  </a:tcPr>
-                </a:tc>
-                <a:tc>
-                  <a:txBody>
-                    <a:bodyPr/>
-                    <a:lstStyle/>
-                    <a:p>
-                      <a:r>
-                        <a:rPr lang="en-US" sz="1200" dirty="0">
-                          <a:solidFill>
-                            <a:schemeClr val="tx1"/>
-                          </a:solidFill>
-                        </a:rPr>
-                        <a:t>L</a:t>
-                      </a:r>
-                      <a:r>
-                        <a:rPr lang="en-CN" sz="1200" dirty="0">
-                          <a:solidFill>
-                            <a:schemeClr val="tx1"/>
-                          </a:solidFill>
-                        </a:rPr>
-                        <a:t>anguage</a:t>
-                      </a:r>
-                    </a:p>
-                  </a:txBody>
-                  <a:tcPr>
-                    <a:lnL w="12700" cap="flat" cmpd="sng" algn="ctr">
-                      <a:solidFill>
-                        <a:schemeClr val="tx1"/>
-                      </a:solidFill>
-                      <a:prstDash val="solid"/>
-                      <a:round/>
-                      <a:headEnd type="none" w="med" len="med"/>
-                      <a:tailEnd type="none" w="med" len="med"/>
-                    </a:lnL>
-                    <a:lnR w="12700" cap="flat" cmpd="sng" algn="ctr">
-                      <a:solidFill>
-                        <a:schemeClr val="tx1"/>
-                      </a:solidFill>
-                      <a:prstDash val="solid"/>
-                      <a:round/>
-                      <a:headEnd type="none" w="med" len="med"/>
-                      <a:tailEnd type="none" w="med" len="med"/>
-                    </a:lnR>
-                    <a:lnT w="12700" cap="flat" cmpd="sng" algn="ctr">
-                      <a:solidFill>
-                        <a:schemeClr val="tx1"/>
-                      </a:solidFill>
-                      <a:prstDash val="solid"/>
-                      <a:round/>
-                      <a:headEnd type="none" w="med" len="med"/>
-                      <a:tailEnd type="none" w="med" len="med"/>
-                    </a:lnT>
-                    <a:lnB w="12700" cap="flat" cmpd="sng" algn="ctr">
-                      <a:solidFill>
-                        <a:schemeClr val="tx1"/>
-                      </a:solidFill>
-                      <a:prstDash val="solid"/>
-                      <a:round/>
-                      <a:headEnd type="none" w="med" len="med"/>
-                      <a:tailEnd type="none" w="med" len="med"/>
-                    </a:lnB>
-                    <a:noFill/>
-                  </a:tcPr>
-                </a:tc>
-                <a:tc>
-                  <a:txBody>
-                    <a:bodyPr/>
-                    <a:lstStyle/>
-                    <a:p>
-                      <a:r>
-                        <a:rPr lang="en-US" sz="1200" dirty="0">
-                          <a:solidFill>
-                            <a:schemeClr val="tx1"/>
-                          </a:solidFill>
-                        </a:rPr>
-                        <a:t>S</a:t>
-                      </a:r>
-                      <a:r>
-                        <a:rPr lang="en-CN" sz="1200" dirty="0">
-                          <a:solidFill>
-                            <a:schemeClr val="tx1"/>
-                          </a:solidFill>
-                        </a:rPr>
-                        <a:t>tart</a:t>
-                      </a:r>
-                    </a:p>
-                  </a:txBody>
-                  <a:tcPr>
-                    <a:lnL w="12700" cap="flat" cmpd="sng" algn="ctr">
-                      <a:solidFill>
-                        <a:schemeClr val="tx1"/>
-                      </a:solidFill>
-                      <a:prstDash val="solid"/>
-                      <a:round/>
-                      <a:headEnd type="none" w="med" len="med"/>
-                      <a:tailEnd type="none" w="med" len="med"/>
-                    </a:lnL>
-                    <a:lnR w="12700" cap="flat" cmpd="sng" algn="ctr">
-                      <a:solidFill>
-                        <a:schemeClr val="tx1"/>
-                      </a:solidFill>
-                      <a:prstDash val="solid"/>
-                      <a:round/>
-                      <a:headEnd type="none" w="med" len="med"/>
-                      <a:tailEnd type="none" w="med" len="med"/>
-                    </a:lnR>
-                    <a:lnT w="12700" cap="flat" cmpd="sng" algn="ctr">
-                      <a:solidFill>
-                        <a:schemeClr val="tx1"/>
-                      </a:solidFill>
-                      <a:prstDash val="solid"/>
-                      <a:round/>
-                      <a:headEnd type="none" w="med" len="med"/>
-                      <a:tailEnd type="none" w="med" len="med"/>
-                    </a:lnT>
-                    <a:lnB w="12700" cap="flat" cmpd="sng" algn="ctr">
-                      <a:solidFill>
-                        <a:schemeClr val="tx1"/>
-                      </a:solidFill>
-                      <a:prstDash val="solid"/>
-                      <a:round/>
-                      <a:headEnd type="none" w="med" len="med"/>
-                      <a:tailEnd type="none" w="med" len="med"/>
-                    </a:lnB>
-                    <a:solidFill>
-                      <a:schemeClr val="accent2"/>
-                    </a:solidFill>
-                  </a:tcPr>
-                </a:tc>
-                <a:tc>
-                  <a:txBody>
-                    <a:bodyPr/>
-                    <a:lstStyle/>
-                    <a:p>
-                      <a:r>
-                        <a:rPr lang="en-CN" sz="1200" dirty="0">
-                          <a:solidFill>
-                            <a:schemeClr val="tx1"/>
-                          </a:solidFill>
-                        </a:rPr>
-                        <a:t>Date</a:t>
-                      </a:r>
-                    </a:p>
-                  </a:txBody>
-                  <a:tcPr>
-                    <a:lnL w="12700" cap="flat" cmpd="sng" algn="ctr">
-                      <a:solidFill>
-                        <a:schemeClr val="tx1"/>
-                      </a:solidFill>
-                      <a:prstDash val="solid"/>
-                      <a:round/>
-                      <a:headEnd type="none" w="med" len="med"/>
-                      <a:tailEnd type="none" w="med" len="med"/>
-                    </a:lnL>
-                    <a:lnR w="12700" cap="flat" cmpd="sng" algn="ctr">
-                      <a:solidFill>
-                        <a:schemeClr val="tx1"/>
-                      </a:solidFill>
-                      <a:prstDash val="solid"/>
-                      <a:round/>
-                      <a:headEnd type="none" w="med" len="med"/>
-                      <a:tailEnd type="none" w="med" len="med"/>
-                    </a:lnR>
-                    <a:lnT w="12700" cap="flat" cmpd="sng" algn="ctr">
-                      <a:solidFill>
-                        <a:schemeClr val="tx1"/>
-                      </a:solidFill>
-                      <a:prstDash val="solid"/>
-                      <a:round/>
-                      <a:headEnd type="none" w="med" len="med"/>
-                      <a:tailEnd type="none" w="med" len="med"/>
-                    </a:lnT>
-                    <a:lnB w="12700" cap="flat" cmpd="sng" algn="ctr">
-                      <a:solidFill>
-                        <a:schemeClr val="tx1"/>
-                      </a:solidFill>
-                      <a:prstDash val="solid"/>
-                      <a:round/>
-                      <a:headEnd type="none" w="med" len="med"/>
-                      <a:tailEnd type="none" w="med" len="med"/>
-                    </a:lnB>
-                    <a:solidFill>
-                      <a:schemeClr val="accent2"/>
-                    </a:solidFill>
-                  </a:tcPr>
-                </a:tc>
-                <a:tc>
-                  <a:txBody>
-                    <a:bodyPr/>
-                    <a:lstStyle/>
-                    <a:p>
-                      <a:r>
-                        <a:rPr lang="en-CN" sz="1200" dirty="0">
-                          <a:solidFill>
-                            <a:schemeClr val="tx1"/>
-                          </a:solidFill>
-                        </a:rPr>
-                        <a:t>passCount</a:t>
-                      </a:r>
-                    </a:p>
-                  </a:txBody>
-                  <a:tcPr>
-                    <a:lnL w="12700" cap="flat" cmpd="sng" algn="ctr">
-                      <a:solidFill>
-                        <a:schemeClr val="tx1"/>
-                      </a:solidFill>
-                      <a:prstDash val="solid"/>
-                      <a:round/>
-                      <a:headEnd type="none" w="med" len="med"/>
-                      <a:tailEnd type="none" w="med" len="med"/>
-                    </a:lnL>
-                    <a:lnR w="12700" cap="flat" cmpd="sng" algn="ctr">
-                      <a:solidFill>
-                        <a:schemeClr val="tx1"/>
-                      </a:solidFill>
-                      <a:prstDash val="solid"/>
-                      <a:round/>
-                      <a:headEnd type="none" w="med" len="med"/>
-                      <a:tailEnd type="none" w="med" len="med"/>
-                    </a:lnR>
-                    <a:lnT w="12700" cap="flat" cmpd="sng" algn="ctr">
-                      <a:solidFill>
-                        <a:schemeClr val="tx1"/>
-                      </a:solidFill>
-                      <a:prstDash val="solid"/>
-                      <a:round/>
-                      <a:headEnd type="none" w="med" len="med"/>
-                      <a:tailEnd type="none" w="med" len="med"/>
-                    </a:lnT>
-                    <a:lnB w="12700" cap="flat" cmpd="sng" algn="ctr">
-                      <a:solidFill>
-                        <a:schemeClr val="tx1"/>
-                      </a:solidFill>
-                      <a:prstDash val="solid"/>
-                      <a:round/>
-                      <a:headEnd type="none" w="med" len="med"/>
-                      <a:tailEnd type="none" w="med" len="med"/>
-                    </a:lnB>
-                    <a:solidFill>
-                      <a:schemeClr val="accent2"/>
-                    </a:solidFill>
-                  </a:tcPr>
-                </a:tc>
-                <a:extLst>
-                  <a:ext uri="{0D108BD9-81ED-4DB2-BD59-A6C34878D82A}">
-                    <a16:rowId xmlns:a16="http://schemas.microsoft.com/office/drawing/2014/main" val="3445340716"/>
-                  </a:ext>
-                </a:extLst>
-              </a:tr>
-            </a:tbl>
-          </a:graphicData>
-        </a:graphic>
-      </p:graphicFrame>
-      <p:graphicFrame>
-        <p:nvGraphicFramePr>
-          <p:cNvPr id="8" name="Table 7">
-            <a:extLst>
-              <a:ext uri="{FF2B5EF4-FFF2-40B4-BE49-F238E27FC236}">
-                <a16:creationId xmlns:a16="http://schemas.microsoft.com/office/drawing/2014/main" id="{257A7003-ADC6-C1DA-8C73-C86E61B586CF}"/>
-              </a:ext>
-            </a:extLst>
-          </p:cNvPr>
-          <p:cNvGraphicFramePr>
-            <a:graphicFrameLocks noGrp="1"/>
-          </p:cNvGraphicFramePr>
-          <p:nvPr>
-            <p:extLst>
-              <p:ext uri="{D42A27DB-BD31-4B8C-83A1-F6EECF244321}">
-                <p14:modId xmlns:p14="http://schemas.microsoft.com/office/powerpoint/2010/main" val="1223481605"/>
-              </p:ext>
-            </p:extLst>
-          </p:nvPr>
-        </p:nvGraphicFramePr>
-        <p:xfrm>
-          <a:off x="2681143" y="3891111"/>
-          <a:ext cx="6071940" cy="274320"/>
-        </p:xfrm>
-        <a:graphic>
-          <a:graphicData uri="http://schemas.openxmlformats.org/drawingml/2006/table">
-            <a:tbl>
-              <a:tblPr firstRow="1" bandRow="1">
-                <a:tableStyleId>{5C22544A-7EE6-4342-B048-85BDC9FD1C3A}</a:tableStyleId>
-              </a:tblPr>
-              <a:tblGrid>
-                <a:gridCol w="1011990">
-                  <a:extLst>
-                    <a:ext uri="{9D8B030D-6E8A-4147-A177-3AD203B41FA5}">
-                      <a16:colId xmlns:a16="http://schemas.microsoft.com/office/drawing/2014/main" val="775975800"/>
-                    </a:ext>
-                  </a:extLst>
-                </a:gridCol>
-                <a:gridCol w="1011990">
-                  <a:extLst>
-                    <a:ext uri="{9D8B030D-6E8A-4147-A177-3AD203B41FA5}">
-                      <a16:colId xmlns:a16="http://schemas.microsoft.com/office/drawing/2014/main" val="2859882136"/>
-                    </a:ext>
-                  </a:extLst>
-                </a:gridCol>
-                <a:gridCol w="1011990">
-                  <a:extLst>
-                    <a:ext uri="{9D8B030D-6E8A-4147-A177-3AD203B41FA5}">
-                      <a16:colId xmlns:a16="http://schemas.microsoft.com/office/drawing/2014/main" val="2480661890"/>
-                    </a:ext>
-                  </a:extLst>
-                </a:gridCol>
-                <a:gridCol w="1011990">
-                  <a:extLst>
-                    <a:ext uri="{9D8B030D-6E8A-4147-A177-3AD203B41FA5}">
-                      <a16:colId xmlns:a16="http://schemas.microsoft.com/office/drawing/2014/main" val="2536831759"/>
-                    </a:ext>
-                  </a:extLst>
-                </a:gridCol>
-                <a:gridCol w="1011990">
-                  <a:extLst>
-                    <a:ext uri="{9D8B030D-6E8A-4147-A177-3AD203B41FA5}">
-                      <a16:colId xmlns:a16="http://schemas.microsoft.com/office/drawing/2014/main" val="2450884560"/>
-                    </a:ext>
-                  </a:extLst>
-                </a:gridCol>
-                <a:gridCol w="1011990">
-                  <a:extLst>
-                    <a:ext uri="{9D8B030D-6E8A-4147-A177-3AD203B41FA5}">
-                      <a16:colId xmlns:a16="http://schemas.microsoft.com/office/drawing/2014/main" val="37746477"/>
-                    </a:ext>
-                  </a:extLst>
-                </a:gridCol>
-              </a:tblGrid>
-              <a:tr h="0">
-                <a:tc>
-                  <a:txBody>
-                    <a:bodyPr/>
-                    <a:lstStyle/>
-                    <a:p>
-                      <a:r>
-                        <a:rPr lang="en-CN" sz="1200" dirty="0">
-                          <a:solidFill>
-                            <a:schemeClr val="tx1"/>
-                          </a:solidFill>
-                        </a:rPr>
-                        <a:t>Spell</a:t>
-                      </a:r>
-                    </a:p>
-                  </a:txBody>
-                  <a:tcPr>
-                    <a:lnL w="12700" cap="flat" cmpd="sng" algn="ctr">
-                      <a:solidFill>
-                        <a:schemeClr val="tx1"/>
-                      </a:solidFill>
-                      <a:prstDash val="solid"/>
-                      <a:round/>
-                      <a:headEnd type="none" w="med" len="med"/>
-                      <a:tailEnd type="none" w="med" len="med"/>
-                    </a:lnL>
-                    <a:lnR w="12700" cap="flat" cmpd="sng" algn="ctr">
-                      <a:solidFill>
-                        <a:schemeClr val="tx1"/>
-                      </a:solidFill>
-                      <a:prstDash val="solid"/>
-                      <a:round/>
-                      <a:headEnd type="none" w="med" len="med"/>
-                      <a:tailEnd type="none" w="med" len="med"/>
-                    </a:lnR>
-                    <a:lnT w="12700" cap="flat" cmpd="sng" algn="ctr">
-                      <a:solidFill>
-                        <a:schemeClr val="tx1"/>
-                      </a:solidFill>
-                      <a:prstDash val="solid"/>
-                      <a:round/>
-                      <a:headEnd type="none" w="med" len="med"/>
-                      <a:tailEnd type="none" w="med" len="med"/>
-                    </a:lnT>
-                    <a:lnB w="12700" cap="flat" cmpd="sng" algn="ctr">
-                      <a:solidFill>
-                        <a:schemeClr val="tx1"/>
-                      </a:solidFill>
-                      <a:prstDash val="solid"/>
-                      <a:round/>
-                      <a:headEnd type="none" w="med" len="med"/>
-                      <a:tailEnd type="none" w="med" len="med"/>
-                    </a:lnB>
-                    <a:noFill/>
-                  </a:tcPr>
-                </a:tc>
-                <a:tc>
-                  <a:txBody>
-                    <a:bodyPr/>
-                    <a:lstStyle/>
-                    <a:p>
-                      <a:r>
-                        <a:rPr lang="en-CN" sz="1200" dirty="0">
-                          <a:solidFill>
-                            <a:schemeClr val="tx1"/>
-                          </a:solidFill>
-                        </a:rPr>
-                        <a:t>passCount</a:t>
-                      </a:r>
-                    </a:p>
-                  </a:txBody>
-                  <a:tcPr>
-                    <a:lnL w="12700" cap="flat" cmpd="sng" algn="ctr">
-                      <a:solidFill>
-                        <a:schemeClr val="tx1"/>
-                      </a:solidFill>
-                      <a:prstDash val="solid"/>
-                      <a:round/>
-                      <a:headEnd type="none" w="med" len="med"/>
-                      <a:tailEnd type="none" w="med" len="med"/>
-                    </a:lnL>
-                    <a:lnR w="12700" cap="flat" cmpd="sng" algn="ctr">
-                      <a:solidFill>
-                        <a:schemeClr val="tx1"/>
-                      </a:solidFill>
-                      <a:prstDash val="solid"/>
-                      <a:round/>
-                      <a:headEnd type="none" w="med" len="med"/>
-                      <a:tailEnd type="none" w="med" len="med"/>
-                    </a:lnR>
-                    <a:lnT w="12700" cap="flat" cmpd="sng" algn="ctr">
-                      <a:solidFill>
-                        <a:schemeClr val="tx1"/>
-                      </a:solidFill>
-                      <a:prstDash val="solid"/>
-                      <a:round/>
-                      <a:headEnd type="none" w="med" len="med"/>
-                      <a:tailEnd type="none" w="med" len="med"/>
-                    </a:lnT>
-                    <a:lnB w="12700" cap="flat" cmpd="sng" algn="ctr">
-                      <a:solidFill>
-                        <a:schemeClr val="tx1"/>
-                      </a:solidFill>
-                      <a:prstDash val="solid"/>
-                      <a:round/>
-                      <a:headEnd type="none" w="med" len="med"/>
-                      <a:tailEnd type="none" w="med" len="med"/>
-                    </a:lnB>
-                    <a:solidFill>
-                      <a:schemeClr val="accent2"/>
-                    </a:solidFill>
-                  </a:tcPr>
-                </a:tc>
-                <a:tc>
-                  <a:txBody>
-                    <a:bodyPr/>
-                    <a:lstStyle/>
-                    <a:p>
-                      <a:r>
-                        <a:rPr lang="en-CN" sz="1200" dirty="0">
-                          <a:solidFill>
-                            <a:schemeClr val="tx1"/>
-                          </a:solidFill>
-                        </a:rPr>
-                        <a:t>ImageNo</a:t>
-                      </a:r>
-                    </a:p>
-                  </a:txBody>
-                  <a:tcPr>
-                    <a:lnL w="12700" cap="flat" cmpd="sng" algn="ctr">
-                      <a:solidFill>
-                        <a:schemeClr val="tx1"/>
-                      </a:solidFill>
-                      <a:prstDash val="solid"/>
-                      <a:round/>
-                      <a:headEnd type="none" w="med" len="med"/>
-                      <a:tailEnd type="none" w="med" len="med"/>
-                    </a:lnL>
-                    <a:lnR w="12700" cap="flat" cmpd="sng" algn="ctr">
-                      <a:solidFill>
-                        <a:schemeClr val="tx1"/>
-                      </a:solidFill>
-                      <a:prstDash val="solid"/>
-                      <a:round/>
-                      <a:headEnd type="none" w="med" len="med"/>
-                      <a:tailEnd type="none" w="med" len="med"/>
-                    </a:lnR>
-                    <a:lnT w="12700" cap="flat" cmpd="sng" algn="ctr">
-                      <a:solidFill>
-                        <a:schemeClr val="tx1"/>
-                      </a:solidFill>
-                      <a:prstDash val="solid"/>
-                      <a:round/>
-                      <a:headEnd type="none" w="med" len="med"/>
-                      <a:tailEnd type="none" w="med" len="med"/>
-                    </a:lnT>
-                    <a:lnB w="12700" cap="flat" cmpd="sng" algn="ctr">
-                      <a:solidFill>
-                        <a:schemeClr val="tx1"/>
-                      </a:solidFill>
-                      <a:prstDash val="solid"/>
-                      <a:round/>
-                      <a:headEnd type="none" w="med" len="med"/>
-                      <a:tailEnd type="none" w="med" len="med"/>
-                    </a:lnB>
-                    <a:solidFill>
-                      <a:schemeClr val="accent2"/>
-                    </a:solidFill>
-                  </a:tcPr>
-                </a:tc>
-                <a:tc>
-                  <a:txBody>
-                    <a:bodyPr/>
-                    <a:lstStyle/>
-                    <a:p>
-                      <a:r>
-                        <a:rPr lang="en-US" sz="1200" dirty="0">
-                          <a:solidFill>
-                            <a:schemeClr val="tx1"/>
-                          </a:solidFill>
-                        </a:rPr>
-                        <a:t>T</a:t>
-                      </a:r>
-                      <a:r>
-                        <a:rPr lang="en-CN" sz="1200" dirty="0">
-                          <a:solidFill>
-                            <a:schemeClr val="tx1"/>
-                          </a:solidFill>
-                        </a:rPr>
-                        <a:t>ype</a:t>
-                      </a:r>
-                    </a:p>
-                  </a:txBody>
-                  <a:tcPr>
-                    <a:lnL w="12700" cap="flat" cmpd="sng" algn="ctr">
-                      <a:solidFill>
-                        <a:schemeClr val="tx1"/>
-                      </a:solidFill>
-                      <a:prstDash val="solid"/>
-                      <a:round/>
-                      <a:headEnd type="none" w="med" len="med"/>
-                      <a:tailEnd type="none" w="med" len="med"/>
-                    </a:lnL>
-                    <a:lnR w="12700" cap="flat" cmpd="sng" algn="ctr">
-                      <a:solidFill>
-                        <a:schemeClr val="tx1"/>
-                      </a:solidFill>
-                      <a:prstDash val="solid"/>
-                      <a:round/>
-                      <a:headEnd type="none" w="med" len="med"/>
-                      <a:tailEnd type="none" w="med" len="med"/>
-                    </a:lnR>
-                    <a:lnT w="12700" cap="flat" cmpd="sng" algn="ctr">
-                      <a:solidFill>
-                        <a:schemeClr val="tx1"/>
-                      </a:solidFill>
-                      <a:prstDash val="solid"/>
-                      <a:round/>
-                      <a:headEnd type="none" w="med" len="med"/>
-                      <a:tailEnd type="none" w="med" len="med"/>
-                    </a:lnT>
-                    <a:lnB w="12700" cap="flat" cmpd="sng" algn="ctr">
-                      <a:solidFill>
-                        <a:schemeClr val="tx1"/>
-                      </a:solidFill>
-                      <a:prstDash val="solid"/>
-                      <a:round/>
-                      <a:headEnd type="none" w="med" len="med"/>
-                      <a:tailEnd type="none" w="med" len="med"/>
-                    </a:lnB>
-                    <a:noFill/>
-                  </a:tcPr>
-                </a:tc>
-                <a:tc>
-                  <a:txBody>
-                    <a:bodyPr/>
-                    <a:lstStyle/>
-                    <a:p>
-                      <a:r>
-                        <a:rPr lang="en-CN" sz="1200" dirty="0">
-                          <a:solidFill>
-                            <a:schemeClr val="tx1"/>
-                          </a:solidFill>
-                        </a:rPr>
-                        <a:t>TypeNo</a:t>
-                      </a:r>
-                    </a:p>
-                  </a:txBody>
-                  <a:tcPr>
-                    <a:lnL w="12700" cap="flat" cmpd="sng" algn="ctr">
-                      <a:solidFill>
-                        <a:schemeClr val="tx1"/>
-                      </a:solidFill>
-                      <a:prstDash val="solid"/>
-                      <a:round/>
-                      <a:headEnd type="none" w="med" len="med"/>
-                      <a:tailEnd type="none" w="med" len="med"/>
-                    </a:lnL>
-                    <a:lnR w="12700" cap="flat" cmpd="sng" algn="ctr">
-                      <a:solidFill>
-                        <a:schemeClr val="tx1"/>
-                      </a:solidFill>
-                      <a:prstDash val="solid"/>
-                      <a:round/>
-                      <a:headEnd type="none" w="med" len="med"/>
-                      <a:tailEnd type="none" w="med" len="med"/>
-                    </a:lnR>
-                    <a:lnT w="12700" cap="flat" cmpd="sng" algn="ctr">
-                      <a:solidFill>
-                        <a:schemeClr val="tx1"/>
-                      </a:solidFill>
-                      <a:prstDash val="solid"/>
-                      <a:round/>
-                      <a:headEnd type="none" w="med" len="med"/>
-                      <a:tailEnd type="none" w="med" len="med"/>
-                    </a:lnT>
-                    <a:lnB w="12700" cap="flat" cmpd="sng" algn="ctr">
-                      <a:solidFill>
-                        <a:schemeClr val="tx1"/>
-                      </a:solidFill>
-                      <a:prstDash val="solid"/>
-                      <a:round/>
-                      <a:headEnd type="none" w="med" len="med"/>
-                      <a:tailEnd type="none" w="med" len="med"/>
-                    </a:lnB>
-                    <a:noFill/>
-                  </a:tcPr>
-                </a:tc>
-                <a:tc>
-                  <a:txBody>
-                    <a:bodyPr/>
-                    <a:lstStyle/>
-                    <a:p>
-                      <a:r>
-                        <a:rPr lang="en-CN" sz="1200" dirty="0">
-                          <a:solidFill>
-                            <a:schemeClr val="tx1"/>
-                          </a:solidFill>
-                        </a:rPr>
-                        <a:t>Tag</a:t>
-                      </a:r>
-                    </a:p>
-                  </a:txBody>
-                  <a:tcPr>
-                    <a:lnL w="12700" cap="flat" cmpd="sng" algn="ctr">
-                      <a:solidFill>
-                        <a:schemeClr val="tx1"/>
-                      </a:solidFill>
-                      <a:prstDash val="solid"/>
-                      <a:round/>
-                      <a:headEnd type="none" w="med" len="med"/>
-                      <a:tailEnd type="none" w="med" len="med"/>
-                    </a:lnL>
-                    <a:lnR w="12700" cap="flat" cmpd="sng" algn="ctr">
-                      <a:solidFill>
-                        <a:schemeClr val="tx1"/>
-                      </a:solidFill>
-                      <a:prstDash val="solid"/>
-                      <a:round/>
-                      <a:headEnd type="none" w="med" len="med"/>
-                      <a:tailEnd type="none" w="med" len="med"/>
-                    </a:lnR>
-                    <a:lnT w="12700" cap="flat" cmpd="sng" algn="ctr">
-                      <a:solidFill>
-                        <a:schemeClr val="tx1"/>
-                      </a:solidFill>
-                      <a:prstDash val="solid"/>
-                      <a:round/>
-                      <a:headEnd type="none" w="med" len="med"/>
-                      <a:tailEnd type="none" w="med" len="med"/>
-                    </a:lnT>
-                    <a:lnB w="12700" cap="flat" cmpd="sng" algn="ctr">
-                      <a:solidFill>
-                        <a:schemeClr val="tx1"/>
-                      </a:solidFill>
-                      <a:prstDash val="solid"/>
-                      <a:round/>
-                      <a:headEnd type="none" w="med" len="med"/>
-                      <a:tailEnd type="none" w="med" len="med"/>
-                    </a:lnB>
-                    <a:solidFill>
-                      <a:schemeClr val="accent2"/>
-                    </a:solidFill>
-                  </a:tcPr>
-                </a:tc>
-                <a:extLst>
-                  <a:ext uri="{0D108BD9-81ED-4DB2-BD59-A6C34878D82A}">
-                    <a16:rowId xmlns:a16="http://schemas.microsoft.com/office/drawing/2014/main" val="3445340716"/>
-                  </a:ext>
-                </a:extLst>
-              </a:tr>
-            </a:tbl>
-          </a:graphicData>
-        </a:graphic>
-      </p:graphicFrame>
-      <p:sp>
-        <p:nvSpPr>
-          <p:cNvPr id="9" name="TextBox 8">
-            <a:extLst>
-              <a:ext uri="{FF2B5EF4-FFF2-40B4-BE49-F238E27FC236}">
-                <a16:creationId xmlns:a16="http://schemas.microsoft.com/office/drawing/2014/main" id="{BED440A5-7257-22A4-E324-2D35DD90D813}"/>
+      <p:sp>
+        <p:nvSpPr>
+          <p:cNvPr id="5" name="TextBox 4">
+            <a:extLst>
+              <a:ext uri="{FF2B5EF4-FFF2-40B4-BE49-F238E27FC236}">
+                <a16:creationId xmlns:a16="http://schemas.microsoft.com/office/drawing/2014/main" id="{464A867B-0925-F4AF-76BE-40563A743589}"/>
               </a:ext>
             </a:extLst>
           </p:cNvPr>
@@ -6268,8 +5941,8 @@
         </p:nvSpPr>
         <p:spPr>
           <a:xfrm>
-            <a:off x="5014677" y="135925"/>
-            <a:ext cx="702436" cy="461665"/>
+            <a:off x="659027" y="2085882"/>
+            <a:ext cx="10873946" cy="1754326"/>
           </a:xfrm>
           <a:prstGeom prst="rect">
             <a:avLst/>
@@ -6277,28 +5950,84 @@
           <a:noFill/>
         </p:spPr>
         <p:txBody>
-          <a:bodyPr wrap="none" rtlCol="0">
+          <a:bodyPr wrap="square" rtlCol="0">
             <a:spAutoFit/>
           </a:bodyPr>
           <a:lstStyle/>
           <a:p>
-            <a:r>
-              <a:rPr lang="en-CN" sz="2400" dirty="0">
-                <a:highlight>
-                  <a:srgbClr val="FFFF00"/>
-                </a:highlight>
+            <a:pPr algn="ctr"/>
+            <a:r>
+              <a:rPr lang="en-US" dirty="0">
+                <a:solidFill>
+                  <a:schemeClr val="bg1"/>
+                </a:solidFill>
               </a:rPr>
-              <a:t>Edit</a:t>
-            </a:r>
-          </a:p>
-        </p:txBody>
-      </p:sp>
-      <p:sp>
-        <p:nvSpPr>
-          <p:cNvPr id="10" name="TextBox 9">
-            <a:extLst>
-              <a:ext uri="{FF2B5EF4-FFF2-40B4-BE49-F238E27FC236}">
-                <a16:creationId xmlns:a16="http://schemas.microsoft.com/office/drawing/2014/main" id="{F149AA72-8852-E0D3-0B65-FD0B73C518B2}"/>
+              <a:t>F</a:t>
+            </a:r>
+            <a:r>
+              <a:rPr lang="en-CN" dirty="0">
+                <a:solidFill>
+                  <a:schemeClr val="bg1"/>
+                </a:solidFill>
+              </a:rPr>
+              <a:t>unction Nameing Convention</a:t>
+            </a:r>
+          </a:p>
+          <a:p>
+            <a:r>
+              <a:rPr lang="en-CN" dirty="0">
+                <a:solidFill>
+                  <a:schemeClr val="bg1"/>
+                </a:solidFill>
+              </a:rPr>
+              <a:t>Public function:</a:t>
+            </a:r>
+          </a:p>
+          <a:p>
+            <a:r>
+              <a:rPr lang="en-CN" dirty="0">
+                <a:solidFill>
+                  <a:schemeClr val="bg1"/>
+                </a:solidFill>
+              </a:rPr>
+              <a:t>Type_FunctionType</a:t>
+            </a:r>
+          </a:p>
+          <a:p>
+            <a:endParaRPr lang="en-CN" dirty="0">
+              <a:solidFill>
+                <a:schemeClr val="bg1"/>
+              </a:solidFill>
+            </a:endParaRPr>
+          </a:p>
+          <a:p>
+            <a:r>
+              <a:rPr lang="en-CN" dirty="0">
+                <a:solidFill>
+                  <a:schemeClr val="bg1"/>
+                </a:solidFill>
+              </a:rPr>
+              <a:t>Private function:</a:t>
+            </a:r>
+          </a:p>
+          <a:p>
+            <a:r>
+              <a:rPr lang="en-CN" dirty="0">
+                <a:solidFill>
+                  <a:schemeClr val="bg1"/>
+                </a:solidFill>
+              </a:rPr>
+              <a:t>P_Type_sqlType_Function</a:t>
+            </a:r>
+          </a:p>
+        </p:txBody>
+      </p:sp>
+      <p:sp>
+        <p:nvSpPr>
+          <p:cNvPr id="11" name="TextBox 10">
+            <a:extLst>
+              <a:ext uri="{FF2B5EF4-FFF2-40B4-BE49-F238E27FC236}">
+                <a16:creationId xmlns:a16="http://schemas.microsoft.com/office/drawing/2014/main" id="{8A236350-573B-BC9B-5C4F-AA2072E907CC}"/>
               </a:ext>
             </a:extLst>
           </p:cNvPr>
@@ -6307,8 +6036,8 @@
         </p:nvSpPr>
         <p:spPr>
           <a:xfrm>
-            <a:off x="2681143" y="4460788"/>
-            <a:ext cx="6071940" cy="369332"/>
+            <a:off x="659027" y="769545"/>
+            <a:ext cx="10873946" cy="1200329"/>
           </a:xfrm>
           <a:prstGeom prst="rect">
             <a:avLst/>
@@ -6321,9 +6050,129 @@
           </a:bodyPr>
           <a:lstStyle/>
           <a:p>
-            <a:r>
-              <a:rPr lang="en-CN" dirty="0"/>
-              <a:t>Spell: </a:t>
+            <a:pPr algn="ctr"/>
+            <a:r>
+              <a:rPr lang="en-CN" dirty="0">
+                <a:solidFill>
+                  <a:schemeClr val="bg1"/>
+                </a:solidFill>
+              </a:rPr>
+              <a:t>Data Conntector</a:t>
+            </a:r>
+          </a:p>
+          <a:p>
+            <a:r>
+              <a:rPr lang="en-CN" dirty="0">
+                <a:solidFill>
+                  <a:schemeClr val="bg1"/>
+                </a:solidFill>
+              </a:rPr>
+              <a:t>Type: MainFolder, Folder, Wordlist</a:t>
+            </a:r>
+          </a:p>
+          <a:p>
+            <a:r>
+              <a:rPr lang="en-CN" dirty="0">
+                <a:solidFill>
+                  <a:schemeClr val="bg1"/>
+                </a:solidFill>
+              </a:rPr>
+              <a:t>sqlType: Record, Table</a:t>
+            </a:r>
+          </a:p>
+          <a:p>
+            <a:r>
+              <a:rPr lang="en-CN" dirty="0">
+                <a:solidFill>
+                  <a:schemeClr val="bg1"/>
+                </a:solidFill>
+              </a:rPr>
+              <a:t>Function: Add, Edit, Delete</a:t>
+            </a:r>
+          </a:p>
+        </p:txBody>
+      </p:sp>
+      <p:sp>
+        <p:nvSpPr>
+          <p:cNvPr id="12" name="TextBox 11">
+            <a:extLst>
+              <a:ext uri="{FF2B5EF4-FFF2-40B4-BE49-F238E27FC236}">
+                <a16:creationId xmlns:a16="http://schemas.microsoft.com/office/drawing/2014/main" id="{D0E3148A-0DF1-765C-C27D-75634C8849F3}"/>
+              </a:ext>
+            </a:extLst>
+          </p:cNvPr>
+          <p:cNvSpPr txBox="1"/>
+          <p:nvPr/>
+        </p:nvSpPr>
+        <p:spPr>
+          <a:xfrm>
+            <a:off x="659027" y="4067082"/>
+            <a:ext cx="10873946" cy="1477328"/>
+          </a:xfrm>
+          <a:prstGeom prst="rect">
+            <a:avLst/>
+          </a:prstGeom>
+          <a:noFill/>
+        </p:spPr>
+        <p:txBody>
+          <a:bodyPr wrap="square" rtlCol="0">
+            <a:spAutoFit/>
+          </a:bodyPr>
+          <a:lstStyle/>
+          <a:p>
+            <a:pPr algn="ctr"/>
+            <a:r>
+              <a:rPr lang="en-US" dirty="0">
+                <a:solidFill>
+                  <a:schemeClr val="bg1"/>
+                </a:solidFill>
+              </a:rPr>
+              <a:t>Function rules</a:t>
+            </a:r>
+            <a:endParaRPr lang="en-CN" dirty="0">
+              <a:solidFill>
+                <a:schemeClr val="bg1"/>
+              </a:solidFill>
+            </a:endParaRPr>
+          </a:p>
+          <a:p>
+            <a:r>
+              <a:rPr lang="en-CN" dirty="0">
+                <a:solidFill>
+                  <a:schemeClr val="bg1"/>
+                </a:solidFill>
+              </a:rPr>
+              <a:t>Public function:</a:t>
+            </a:r>
+          </a:p>
+          <a:p>
+            <a:r>
+              <a:rPr lang="en-CN" dirty="0">
+                <a:solidFill>
+                  <a:schemeClr val="bg1"/>
+                </a:solidFill>
+              </a:rPr>
+              <a:t>Add function should return Bool indicating whether a duplicate exist</a:t>
+            </a:r>
+          </a:p>
+          <a:p>
+            <a:r>
+              <a:rPr lang="en-CN" dirty="0">
+                <a:solidFill>
+                  <a:schemeClr val="bg1"/>
+                </a:solidFill>
+              </a:rPr>
+              <a:t>Edit function should not return anything but fatalerror when error occurs</a:t>
+            </a:r>
+          </a:p>
+          <a:p>
+            <a:r>
+              <a:rPr lang="en-CN" dirty="0">
+                <a:solidFill>
+                  <a:schemeClr val="bg1"/>
+                </a:solidFill>
+              </a:rPr>
+              <a:t>Delete function should not return anything but fatalerror when error occurs</a:t>
             </a:r>
           </a:p>
         </p:txBody>
@@ -6363,7 +6212,7 @@
           <p:cNvPr id="4" name="TextBox 3">
             <a:extLst>
               <a:ext uri="{FF2B5EF4-FFF2-40B4-BE49-F238E27FC236}">
-                <a16:creationId xmlns:a16="http://schemas.microsoft.com/office/drawing/2014/main" id="{69565D19-E64E-41FE-C7F2-DC39ABD296D7}"/>
+                <a16:creationId xmlns:a16="http://schemas.microsoft.com/office/drawing/2014/main" id="{89CEB2C8-580C-9933-B2CB-06AD1EC73A8A}"/>
               </a:ext>
             </a:extLst>
           </p:cNvPr>
@@ -6372,8 +6221,8 @@
         </p:nvSpPr>
         <p:spPr>
           <a:xfrm>
-            <a:off x="5150068" y="336331"/>
-            <a:ext cx="1351652" cy="369332"/>
+            <a:off x="659027" y="769545"/>
+            <a:ext cx="10873946" cy="1200329"/>
           </a:xfrm>
           <a:prstGeom prst="rect">
             <a:avLst/>
@@ -6381,74 +6230,690 @@
           <a:noFill/>
         </p:spPr>
         <p:txBody>
-          <a:bodyPr wrap="none" rtlCol="0">
+          <a:bodyPr wrap="square" rtlCol="0">
             <a:spAutoFit/>
           </a:bodyPr>
           <a:lstStyle/>
           <a:p>
-            <a:r>
-              <a:rPr lang="en-CN" dirty="0"/>
-              <a:t>Design Idea</a:t>
-            </a:r>
-          </a:p>
-        </p:txBody>
-      </p:sp>
-      <p:sp>
-        <p:nvSpPr>
-          <p:cNvPr id="5" name="Rounded Rectangle 4">
-            <a:extLst>
-              <a:ext uri="{FF2B5EF4-FFF2-40B4-BE49-F238E27FC236}">
-                <a16:creationId xmlns:a16="http://schemas.microsoft.com/office/drawing/2014/main" id="{327E773D-6C6E-D48F-6EF4-1D0EAD1AA9AE}"/>
-              </a:ext>
-            </a:extLst>
-          </p:cNvPr>
-          <p:cNvSpPr/>
+            <a:pPr algn="ctr"/>
+            <a:r>
+              <a:rPr lang="en-CN" dirty="0">
+                <a:solidFill>
+                  <a:schemeClr val="bg1"/>
+                </a:solidFill>
+              </a:rPr>
+              <a:t>sqlTable Naming Convention</a:t>
+            </a:r>
+          </a:p>
+          <a:p>
+            <a:r>
+              <a:rPr lang="en-CN" dirty="0">
+                <a:solidFill>
+                  <a:schemeClr val="bg1"/>
+                </a:solidFill>
+              </a:rPr>
+              <a:t>MainFolder: ”MainFolder”</a:t>
+            </a:r>
+          </a:p>
+          <a:p>
+            <a:r>
+              <a:rPr lang="en-CN" dirty="0">
+                <a:solidFill>
+                  <a:schemeClr val="bg1"/>
+                </a:solidFill>
+              </a:rPr>
+              <a:t>Folder: “+(Folder.ID)”</a:t>
+            </a:r>
+          </a:p>
+          <a:p>
+            <a:r>
+              <a:rPr lang="en-CN" dirty="0">
+                <a:solidFill>
+                  <a:schemeClr val="bg1"/>
+                </a:solidFill>
+              </a:rPr>
+              <a:t>WordList: “”</a:t>
+            </a:r>
+          </a:p>
+        </p:txBody>
+      </p:sp>
+    </p:spTree>
+    <p:extLst>
+      <p:ext uri="{BB962C8B-B14F-4D97-AF65-F5344CB8AC3E}">
+        <p14:creationId xmlns:p14="http://schemas.microsoft.com/office/powerpoint/2010/main" val="4132864151"/>
+      </p:ext>
+    </p:extLst>
+  </p:cSld>
+  <p:clrMapOvr>
+    <a:masterClrMapping/>
+  </p:clrMapOvr>
+</p:sld>
+</file>
+
+<file path=ppt/slides/slide4.xml><?xml version="1.0" encoding="utf-8"?>
+<p:sld xmlns:a="http://schemas.openxmlformats.org/drawingml/2006/main" xmlns:r="http://schemas.openxmlformats.org/officeDocument/2006/relationships" xmlns:p="http://schemas.openxmlformats.org/presentationml/2006/main">
+  <p:cSld>
+    <p:spTree>
+      <p:nvGrpSpPr>
+        <p:cNvPr id="1" name=""/>
+        <p:cNvGrpSpPr/>
+        <p:nvPr/>
+      </p:nvGrpSpPr>
+      <p:grpSpPr>
+        <a:xfrm>
+          <a:off x="0" y="0"/>
+          <a:ext cx="0" cy="0"/>
+          <a:chOff x="0" y="0"/>
+          <a:chExt cx="0" cy="0"/>
+        </a:xfrm>
+      </p:grpSpPr>
+      <p:sp>
+        <p:nvSpPr>
+          <p:cNvPr id="4" name="TextBox 3">
+            <a:extLst>
+              <a:ext uri="{FF2B5EF4-FFF2-40B4-BE49-F238E27FC236}">
+                <a16:creationId xmlns:a16="http://schemas.microsoft.com/office/drawing/2014/main" id="{ED501A0E-DB6E-21B8-02C2-7260F0EB7296}"/>
+              </a:ext>
+            </a:extLst>
+          </p:cNvPr>
+          <p:cNvSpPr txBox="1"/>
           <p:nvPr/>
         </p:nvSpPr>
         <p:spPr>
           <a:xfrm>
-            <a:off x="1019503" y="861849"/>
-            <a:ext cx="1996966" cy="2175641"/>
+            <a:off x="659027" y="769545"/>
+            <a:ext cx="10873946" cy="3139321"/>
           </a:xfrm>
-          <a:prstGeom prst="roundRect">
+          <a:prstGeom prst="rect">
             <a:avLst/>
           </a:prstGeom>
           <a:noFill/>
-          <a:ln>
-            <a:solidFill>
-              <a:schemeClr val="accent4"/>
-            </a:solidFill>
-          </a:ln>
         </p:spPr>
-        <p:style>
-          <a:lnRef idx="2">
-            <a:schemeClr val="accent1">
-              <a:shade val="15000"/>
-            </a:schemeClr>
-          </a:lnRef>
-          <a:fillRef idx="1">
-            <a:schemeClr val="accent1"/>
-          </a:fillRef>
-          <a:effectRef idx="0">
-            <a:schemeClr val="accent1"/>
-          </a:effectRef>
-          <a:fontRef idx="minor">
-            <a:schemeClr val="lt1"/>
-          </a:fontRef>
-        </p:style>
-        <p:txBody>
-          <a:bodyPr rtlCol="0" anchor="ctr"/>
+        <p:txBody>
+          <a:bodyPr wrap="square" rtlCol="0">
+            <a:spAutoFit/>
+          </a:bodyPr>
           <a:lstStyle/>
           <a:p>
             <a:pPr algn="ctr"/>
-            <a:endParaRPr lang="en-CN"/>
+            <a:r>
+              <a:rPr lang="en-CN" dirty="0">
+                <a:solidFill>
+                  <a:schemeClr val="bg1"/>
+                </a:solidFill>
+              </a:rPr>
+              <a:t>MainFolder Operation Mechanism</a:t>
+            </a:r>
+          </a:p>
+          <a:p>
+            <a:r>
+              <a:rPr lang="en-CN" dirty="0">
+                <a:solidFill>
+                  <a:schemeClr val="bg1"/>
+                </a:solidFill>
+              </a:rPr>
+              <a:t>1.  MainFolder_AddFolder</a:t>
+            </a:r>
+          </a:p>
+          <a:p>
+            <a:pPr marL="285750" indent="-285750">
+              <a:buFont typeface="Arial" panose="020B0604020202020204" pitchFamily="34" charset="0"/>
+              <a:buChar char="•"/>
+            </a:pPr>
+            <a:r>
+              <a:rPr lang="en-CN" dirty="0">
+                <a:solidFill>
+                  <a:schemeClr val="bg1"/>
+                </a:solidFill>
+              </a:rPr>
+              <a:t>ModelData is responsible for adding the folder in the sql databse</a:t>
+            </a:r>
+          </a:p>
+          <a:p>
+            <a:pPr marL="285750" indent="-285750">
+              <a:buFont typeface="Arial" panose="020B0604020202020204" pitchFamily="34" charset="0"/>
+              <a:buChar char="•"/>
+            </a:pPr>
+            <a:r>
+              <a:rPr lang="en-CN" dirty="0">
+                <a:solidFill>
+                  <a:schemeClr val="bg1"/>
+                </a:solidFill>
+              </a:rPr>
+              <a:t>Caller View is responsible for adding the folder to the mainFolder in the ModelData in sequence. </a:t>
+            </a:r>
+          </a:p>
+          <a:p>
+            <a:endParaRPr lang="en-CN" dirty="0">
+              <a:solidFill>
+                <a:schemeClr val="bg1"/>
+              </a:solidFill>
+            </a:endParaRPr>
+          </a:p>
+          <a:p>
+            <a:r>
+              <a:rPr lang="en-CN" dirty="0">
+                <a:solidFill>
+                  <a:schemeClr val="bg1"/>
+                </a:solidFill>
+              </a:rPr>
+              <a:t>2.  MainFolder_DeleteFolder</a:t>
+            </a:r>
+          </a:p>
+          <a:p>
+            <a:pPr marL="285750" indent="-285750">
+              <a:buFont typeface="Arial" panose="020B0604020202020204" pitchFamily="34" charset="0"/>
+              <a:buChar char="•"/>
+            </a:pPr>
+            <a:r>
+              <a:rPr lang="en-CN" dirty="0">
+                <a:solidFill>
+                  <a:schemeClr val="bg1"/>
+                </a:solidFill>
+              </a:rPr>
+              <a:t>ModelData is responsible for deleting the folder in the sql database</a:t>
+            </a:r>
+          </a:p>
+          <a:p>
+            <a:pPr marL="285750" indent="-285750">
+              <a:buFont typeface="Arial" panose="020B0604020202020204" pitchFamily="34" charset="0"/>
+              <a:buChar char="•"/>
+            </a:pPr>
+            <a:r>
+              <a:rPr lang="en-CN" dirty="0">
+                <a:solidFill>
+                  <a:schemeClr val="bg1"/>
+                </a:solidFill>
+              </a:rPr>
+              <a:t>Caller View is responsible for deleting the folder in the ModelData.mainFolder</a:t>
+            </a:r>
+          </a:p>
+          <a:p>
+            <a:pPr marL="285750" indent="-285750">
+              <a:buFont typeface="Arial" panose="020B0604020202020204" pitchFamily="34" charset="0"/>
+              <a:buChar char="•"/>
+            </a:pPr>
+            <a:endParaRPr lang="en-CN" dirty="0">
+              <a:solidFill>
+                <a:schemeClr val="bg1"/>
+              </a:solidFill>
+            </a:endParaRPr>
+          </a:p>
+          <a:p>
+            <a:r>
+              <a:rPr lang="en-US" altLang="zh-CN" dirty="0">
+                <a:solidFill>
+                  <a:schemeClr val="bg1"/>
+                </a:solidFill>
+              </a:rPr>
+              <a:t>3.</a:t>
+            </a:r>
+            <a:r>
+              <a:rPr lang="zh-CN" altLang="en-US" dirty="0">
+                <a:solidFill>
+                  <a:schemeClr val="bg1"/>
+                </a:solidFill>
+              </a:rPr>
+              <a:t>  </a:t>
+            </a:r>
+            <a:r>
+              <a:rPr lang="en-CN" dirty="0">
+                <a:solidFill>
+                  <a:schemeClr val="bg1"/>
+                </a:solidFill>
+              </a:rPr>
+              <a:t>P_MainFolder_Load</a:t>
+            </a:r>
+          </a:p>
+          <a:p>
+            <a:pPr marL="285750" indent="-285750">
+              <a:buFont typeface="Arial" panose="020B0604020202020204" pitchFamily="34" charset="0"/>
+              <a:buChar char="•"/>
+            </a:pPr>
+            <a:r>
+              <a:rPr lang="en-CN" dirty="0">
+                <a:solidFill>
+                  <a:schemeClr val="bg1"/>
+                </a:solidFill>
+              </a:rPr>
+              <a:t>Reload MainFolder</a:t>
+            </a:r>
           </a:p>
         </p:txBody>
       </p:sp>
     </p:spTree>
     <p:extLst>
       <p:ext uri="{BB962C8B-B14F-4D97-AF65-F5344CB8AC3E}">
-        <p14:creationId xmlns:p14="http://schemas.microsoft.com/office/powerpoint/2010/main" val="2149802160"/>
+        <p14:creationId xmlns:p14="http://schemas.microsoft.com/office/powerpoint/2010/main" val="4052599436"/>
+      </p:ext>
+    </p:extLst>
+  </p:cSld>
+  <p:clrMapOvr>
+    <a:masterClrMapping/>
+  </p:clrMapOvr>
+</p:sld>
+</file>
+
+<file path=ppt/slides/slide5.xml><?xml version="1.0" encoding="utf-8"?>
+<p:sld xmlns:a="http://schemas.openxmlformats.org/drawingml/2006/main" xmlns:r="http://schemas.openxmlformats.org/officeDocument/2006/relationships" xmlns:p="http://schemas.openxmlformats.org/presentationml/2006/main">
+  <p:cSld>
+    <p:spTree>
+      <p:nvGrpSpPr>
+        <p:cNvPr id="1" name="">
+          <a:extLst>
+            <a:ext uri="{FF2B5EF4-FFF2-40B4-BE49-F238E27FC236}">
+              <a16:creationId xmlns:a16="http://schemas.microsoft.com/office/drawing/2014/main" id="{F830090D-B07D-8C8F-DDBB-CC86FE01971A}"/>
+            </a:ext>
+          </a:extLst>
+        </p:cNvPr>
+        <p:cNvGrpSpPr/>
+        <p:nvPr/>
+      </p:nvGrpSpPr>
+      <p:grpSpPr>
+        <a:xfrm>
+          <a:off x="0" y="0"/>
+          <a:ext cx="0" cy="0"/>
+          <a:chOff x="0" y="0"/>
+          <a:chExt cx="0" cy="0"/>
+        </a:xfrm>
+      </p:grpSpPr>
+      <p:sp>
+        <p:nvSpPr>
+          <p:cNvPr id="4" name="TextBox 3">
+            <a:extLst>
+              <a:ext uri="{FF2B5EF4-FFF2-40B4-BE49-F238E27FC236}">
+                <a16:creationId xmlns:a16="http://schemas.microsoft.com/office/drawing/2014/main" id="{86A7B9C5-57AA-0D7A-818D-B70C3F7C3CDC}"/>
+              </a:ext>
+            </a:extLst>
+          </p:cNvPr>
+          <p:cNvSpPr txBox="1"/>
+          <p:nvPr/>
+        </p:nvSpPr>
+        <p:spPr>
+          <a:xfrm>
+            <a:off x="659027" y="769545"/>
+            <a:ext cx="10873946" cy="3970318"/>
+          </a:xfrm>
+          <a:prstGeom prst="rect">
+            <a:avLst/>
+          </a:prstGeom>
+          <a:noFill/>
+        </p:spPr>
+        <p:txBody>
+          <a:bodyPr wrap="square" rtlCol="0">
+            <a:spAutoFit/>
+          </a:bodyPr>
+          <a:lstStyle/>
+          <a:p>
+            <a:pPr algn="ctr"/>
+            <a:r>
+              <a:rPr lang="en-CN" dirty="0">
+                <a:solidFill>
+                  <a:schemeClr val="bg1"/>
+                </a:solidFill>
+              </a:rPr>
+              <a:t>Folder Operation Mechanism</a:t>
+            </a:r>
+          </a:p>
+          <a:p>
+            <a:r>
+              <a:rPr lang="en-CN" dirty="0">
+                <a:solidFill>
+                  <a:schemeClr val="bg1"/>
+                </a:solidFill>
+              </a:rPr>
+              <a:t>1.  Folder_AddWordList</a:t>
+            </a:r>
+          </a:p>
+          <a:p>
+            <a:pPr marL="285750" indent="-285750">
+              <a:buFont typeface="Arial" panose="020B0604020202020204" pitchFamily="34" charset="0"/>
+              <a:buChar char="•"/>
+            </a:pPr>
+            <a:r>
+              <a:rPr lang="en-CN" dirty="0">
+                <a:solidFill>
+                  <a:schemeClr val="bg1"/>
+                </a:solidFill>
+              </a:rPr>
+              <a:t>ModelData is responsible for adding the WordList in the sql database</a:t>
+            </a:r>
+          </a:p>
+          <a:p>
+            <a:pPr marL="285750" indent="-285750">
+              <a:buFont typeface="Arial" panose="020B0604020202020204" pitchFamily="34" charset="0"/>
+              <a:buChar char="•"/>
+            </a:pPr>
+            <a:r>
+              <a:rPr lang="en-CN" dirty="0">
+                <a:solidFill>
+                  <a:schemeClr val="bg1"/>
+                </a:solidFill>
+              </a:rPr>
+              <a:t>Caller View is responsible for adding the WordList to ModelData.curSelectedFolder in “sequence”. </a:t>
+            </a:r>
+          </a:p>
+          <a:p>
+            <a:pPr marL="342900" indent="-342900">
+              <a:buAutoNum type="arabicPeriod"/>
+            </a:pPr>
+            <a:endParaRPr lang="en-CN" dirty="0">
+              <a:solidFill>
+                <a:schemeClr val="bg1"/>
+              </a:solidFill>
+            </a:endParaRPr>
+          </a:p>
+          <a:p>
+            <a:r>
+              <a:rPr lang="en-CN" dirty="0">
+                <a:solidFill>
+                  <a:schemeClr val="bg1"/>
+                </a:solidFill>
+              </a:rPr>
+              <a:t>2.  Folder_DeleteWordList</a:t>
+            </a:r>
+          </a:p>
+          <a:p>
+            <a:pPr marL="285750" indent="-285750">
+              <a:buFont typeface="Arial" panose="020B0604020202020204" pitchFamily="34" charset="0"/>
+              <a:buChar char="•"/>
+            </a:pPr>
+            <a:r>
+              <a:rPr lang="en-CN" dirty="0">
+                <a:solidFill>
+                  <a:schemeClr val="bg1"/>
+                </a:solidFill>
+              </a:rPr>
+              <a:t>ModelData is responsible for deleting the folder in the sql database</a:t>
+            </a:r>
+          </a:p>
+          <a:p>
+            <a:pPr marL="285750" indent="-285750">
+              <a:buFont typeface="Arial" panose="020B0604020202020204" pitchFamily="34" charset="0"/>
+              <a:buChar char="•"/>
+            </a:pPr>
+            <a:r>
+              <a:rPr lang="en-CN" dirty="0">
+                <a:solidFill>
+                  <a:schemeClr val="bg1"/>
+                </a:solidFill>
+              </a:rPr>
+              <a:t>Caller View is responsible for deleting the folder in the ModelData.curSelectedFolder.</a:t>
+            </a:r>
+          </a:p>
+          <a:p>
+            <a:pPr marL="285750" indent="-285750">
+              <a:buFont typeface="Arial" panose="020B0604020202020204" pitchFamily="34" charset="0"/>
+              <a:buChar char="•"/>
+            </a:pPr>
+            <a:endParaRPr lang="en-CN" dirty="0">
+              <a:solidFill>
+                <a:schemeClr val="bg1"/>
+              </a:solidFill>
+            </a:endParaRPr>
+          </a:p>
+          <a:p>
+            <a:r>
+              <a:rPr lang="en-CN" dirty="0">
+                <a:solidFill>
+                  <a:schemeClr val="bg1"/>
+                </a:solidFill>
+              </a:rPr>
+              <a:t>3.  Folder_EditWordList(oldWordList, newWordList)</a:t>
+            </a:r>
+          </a:p>
+          <a:p>
+            <a:pPr marL="285750" indent="-285750">
+              <a:buFont typeface="Arial" panose="020B0604020202020204" pitchFamily="34" charset="0"/>
+              <a:buChar char="•"/>
+            </a:pPr>
+            <a:r>
+              <a:rPr lang="en-CN" dirty="0">
+                <a:solidFill>
+                  <a:schemeClr val="bg1"/>
+                </a:solidFill>
+              </a:rPr>
+              <a:t>ModelData is responsible for editing the oldWordList to newWordList both in database and in view(since WordList is passed by reference)</a:t>
+            </a:r>
+          </a:p>
+          <a:p>
+            <a:pPr marL="285750" indent="-285750">
+              <a:buFont typeface="Arial" panose="020B0604020202020204" pitchFamily="34" charset="0"/>
+              <a:buChar char="•"/>
+            </a:pPr>
+            <a:r>
+              <a:rPr lang="en-CN" dirty="0">
+                <a:solidFill>
+                  <a:schemeClr val="bg1"/>
+                </a:solidFill>
+              </a:rPr>
+              <a:t>Caller View is responsible for handling the error(too many duplicate WordLists)</a:t>
+            </a:r>
+          </a:p>
+          <a:p>
+            <a:endParaRPr lang="en-CN" dirty="0">
+              <a:solidFill>
+                <a:schemeClr val="bg1"/>
+              </a:solidFill>
+            </a:endParaRPr>
+          </a:p>
+        </p:txBody>
+      </p:sp>
+    </p:spTree>
+    <p:extLst>
+      <p:ext uri="{BB962C8B-B14F-4D97-AF65-F5344CB8AC3E}">
+        <p14:creationId xmlns:p14="http://schemas.microsoft.com/office/powerpoint/2010/main" val="2712244371"/>
+      </p:ext>
+    </p:extLst>
+  </p:cSld>
+  <p:clrMapOvr>
+    <a:masterClrMapping/>
+  </p:clrMapOvr>
+</p:sld>
+</file>
+
+<file path=ppt/slides/slide6.xml><?xml version="1.0" encoding="utf-8"?>
+<p:sld xmlns:a="http://schemas.openxmlformats.org/drawingml/2006/main" xmlns:r="http://schemas.openxmlformats.org/officeDocument/2006/relationships" xmlns:p="http://schemas.openxmlformats.org/presentationml/2006/main">
+  <p:cSld>
+    <p:spTree>
+      <p:nvGrpSpPr>
+        <p:cNvPr id="1" name="">
+          <a:extLst>
+            <a:ext uri="{FF2B5EF4-FFF2-40B4-BE49-F238E27FC236}">
+              <a16:creationId xmlns:a16="http://schemas.microsoft.com/office/drawing/2014/main" id="{63174357-EA9C-4796-42E1-2B2ED8760840}"/>
+            </a:ext>
+          </a:extLst>
+        </p:cNvPr>
+        <p:cNvGrpSpPr/>
+        <p:nvPr/>
+      </p:nvGrpSpPr>
+      <p:grpSpPr>
+        <a:xfrm>
+          <a:off x="0" y="0"/>
+          <a:ext cx="0" cy="0"/>
+          <a:chOff x="0" y="0"/>
+          <a:chExt cx="0" cy="0"/>
+        </a:xfrm>
+      </p:grpSpPr>
+      <p:sp>
+        <p:nvSpPr>
+          <p:cNvPr id="4" name="TextBox 3">
+            <a:extLst>
+              <a:ext uri="{FF2B5EF4-FFF2-40B4-BE49-F238E27FC236}">
+                <a16:creationId xmlns:a16="http://schemas.microsoft.com/office/drawing/2014/main" id="{72D0AF0E-7C8C-2041-CDE1-68B95EC54D6D}"/>
+              </a:ext>
+            </a:extLst>
+          </p:cNvPr>
+          <p:cNvSpPr txBox="1"/>
+          <p:nvPr/>
+        </p:nvSpPr>
+        <p:spPr>
+          <a:xfrm>
+            <a:off x="659027" y="769545"/>
+            <a:ext cx="10873946" cy="3693319"/>
+          </a:xfrm>
+          <a:prstGeom prst="rect">
+            <a:avLst/>
+          </a:prstGeom>
+          <a:noFill/>
+        </p:spPr>
+        <p:txBody>
+          <a:bodyPr wrap="square" rtlCol="0">
+            <a:spAutoFit/>
+          </a:bodyPr>
+          <a:lstStyle/>
+          <a:p>
+            <a:pPr algn="ctr"/>
+            <a:r>
+              <a:rPr lang="en-CN" dirty="0">
+                <a:solidFill>
+                  <a:schemeClr val="bg1"/>
+                </a:solidFill>
+              </a:rPr>
+              <a:t>WordList Operation Mechanism</a:t>
+            </a:r>
+          </a:p>
+          <a:p>
+            <a:r>
+              <a:rPr lang="en-CN" dirty="0">
+                <a:solidFill>
+                  <a:schemeClr val="bg1"/>
+                </a:solidFill>
+              </a:rPr>
+              <a:t>1.  WordList_AddWord</a:t>
+            </a:r>
+          </a:p>
+          <a:p>
+            <a:pPr marL="285750" indent="-285750">
+              <a:buFont typeface="Arial" panose="020B0604020202020204" pitchFamily="34" charset="0"/>
+              <a:buChar char="•"/>
+            </a:pPr>
+            <a:r>
+              <a:rPr lang="en-CN" dirty="0">
+                <a:solidFill>
+                  <a:schemeClr val="bg1"/>
+                </a:solidFill>
+              </a:rPr>
+              <a:t>ModelData is responsible for adding the word in the database</a:t>
+            </a:r>
+          </a:p>
+          <a:p>
+            <a:pPr marL="285750" indent="-285750">
+              <a:buFont typeface="Arial" panose="020B0604020202020204" pitchFamily="34" charset="0"/>
+              <a:buChar char="•"/>
+            </a:pPr>
+            <a:r>
+              <a:rPr lang="en-CN" dirty="0">
+                <a:solidFill>
+                  <a:schemeClr val="bg1"/>
+                </a:solidFill>
+              </a:rPr>
+              <a:t>Caller View is responsible for adding the word to ModelData.curSelectedWordList in sequence </a:t>
+            </a:r>
+          </a:p>
+          <a:p>
+            <a:pPr marL="342900" indent="-342900">
+              <a:buAutoNum type="arabicPeriod"/>
+            </a:pPr>
+            <a:endParaRPr lang="en-CN" dirty="0">
+              <a:solidFill>
+                <a:schemeClr val="bg1"/>
+              </a:solidFill>
+            </a:endParaRPr>
+          </a:p>
+          <a:p>
+            <a:r>
+              <a:rPr lang="en-CN" dirty="0">
+                <a:solidFill>
+                  <a:schemeClr val="bg1"/>
+                </a:solidFill>
+              </a:rPr>
+              <a:t>2.  WordList_DeleteWord</a:t>
+            </a:r>
+          </a:p>
+          <a:p>
+            <a:pPr marL="285750" indent="-285750">
+              <a:buFont typeface="Arial" panose="020B0604020202020204" pitchFamily="34" charset="0"/>
+              <a:buChar char="•"/>
+            </a:pPr>
+            <a:r>
+              <a:rPr lang="en-CN" dirty="0">
+                <a:solidFill>
+                  <a:schemeClr val="bg1"/>
+                </a:solidFill>
+              </a:rPr>
+              <a:t>ModelData is responsible for deleting the word in the sql database</a:t>
+            </a:r>
+          </a:p>
+          <a:p>
+            <a:pPr marL="285750" indent="-285750">
+              <a:buFont typeface="Arial" panose="020B0604020202020204" pitchFamily="34" charset="0"/>
+              <a:buChar char="•"/>
+            </a:pPr>
+            <a:r>
+              <a:rPr lang="en-CN" dirty="0">
+                <a:solidFill>
+                  <a:schemeClr val="bg1"/>
+                </a:solidFill>
+              </a:rPr>
+              <a:t>Caller View is responsible for deleting the word in the ModelData.curSelectedWordList</a:t>
+            </a:r>
+          </a:p>
+          <a:p>
+            <a:pPr marL="285750" indent="-285750">
+              <a:buFont typeface="Arial" panose="020B0604020202020204" pitchFamily="34" charset="0"/>
+              <a:buChar char="•"/>
+            </a:pPr>
+            <a:endParaRPr lang="en-CN" dirty="0">
+              <a:solidFill>
+                <a:schemeClr val="bg1"/>
+              </a:solidFill>
+            </a:endParaRPr>
+          </a:p>
+          <a:p>
+            <a:r>
+              <a:rPr lang="en-CN" dirty="0">
+                <a:solidFill>
+                  <a:schemeClr val="bg1"/>
+                </a:solidFill>
+              </a:rPr>
+              <a:t>3.  WordList_EditWord(oldWord, newWord)</a:t>
+            </a:r>
+          </a:p>
+          <a:p>
+            <a:pPr marL="285750" indent="-285750">
+              <a:buFont typeface="Arial" panose="020B0604020202020204" pitchFamily="34" charset="0"/>
+              <a:buChar char="•"/>
+            </a:pPr>
+            <a:r>
+              <a:rPr lang="en-CN" dirty="0">
+                <a:solidFill>
+                  <a:schemeClr val="bg1"/>
+                </a:solidFill>
+              </a:rPr>
+              <a:t>ModelData is responsible for editing the oldWord to newWord in database</a:t>
+            </a:r>
+          </a:p>
+          <a:p>
+            <a:pPr marL="285750" indent="-285750">
+              <a:buFont typeface="Arial" panose="020B0604020202020204" pitchFamily="34" charset="0"/>
+              <a:buChar char="•"/>
+            </a:pPr>
+            <a:r>
+              <a:rPr lang="en-CN" dirty="0">
+                <a:solidFill>
+                  <a:schemeClr val="bg1"/>
+                </a:solidFill>
+              </a:rPr>
+              <a:t>Caller View is responsible for editing the oldWord to newWord in place.(By binding the oldWord to the element in the WordList)</a:t>
+            </a:r>
+          </a:p>
+        </p:txBody>
+      </p:sp>
+    </p:spTree>
+    <p:extLst>
+      <p:ext uri="{BB962C8B-B14F-4D97-AF65-F5344CB8AC3E}">
+        <p14:creationId xmlns:p14="http://schemas.microsoft.com/office/powerpoint/2010/main" val="278493903"/>
       </p:ext>
     </p:extLst>
   </p:cSld>
